--- a/output_pptx/Jesus_Paid_It_All.pptx
+++ b/output_pptx/Jesus_Paid_It_All.pptx
@@ -3123,8 +3123,8 @@
         </p:nvSpPr>
         <p:spPr>
           <a:xfrm>
-            <a:off x="594360" y="1837944"/>
-            <a:ext cx="11002975" cy="685800"/>
+            <a:off x="640080" y="1650492"/>
+            <a:ext cx="10911535" cy="731520"/>
           </a:xfrm>
           <a:prstGeom prst="rect">
             <a:avLst/>
@@ -3139,7 +3139,7 @@
           <a:p>
             <a:pPr algn="ctr"/>
             <a:r>
-              <a:rPr sz="4400" b="1" i="0">
+              <a:rPr sz="4800" b="1" i="0">
                 <a:solidFill>
                   <a:srgbClr val="FFFFFF"/>
                 </a:solidFill>
@@ -3158,8 +3158,8 @@
         </p:nvSpPr>
         <p:spPr>
           <a:xfrm>
-            <a:off x="594360" y="2560320"/>
-            <a:ext cx="11002975" cy="384048"/>
+            <a:off x="640080" y="2418588"/>
+            <a:ext cx="10911535" cy="365760"/>
           </a:xfrm>
           <a:prstGeom prst="rect">
             <a:avLst/>
@@ -3176,7 +3176,7 @@
             <a:r>
               <a:rPr sz="2400" b="0" i="1">
                 <a:solidFill>
-                  <a:srgbClr val="B4B4B4"/>
+                  <a:srgbClr val="AAAAAA"/>
                 </a:solidFill>
                 <a:latin typeface="Arial"/>
               </a:rPr>
@@ -3193,8 +3193,8 @@
         </p:nvSpPr>
         <p:spPr>
           <a:xfrm>
-            <a:off x="594360" y="2980944"/>
-            <a:ext cx="11002975" cy="347472"/>
+            <a:off x="640080" y="2985516"/>
+            <a:ext cx="10911535" cy="731520"/>
           </a:xfrm>
           <a:prstGeom prst="rect">
             <a:avLst/>
@@ -3209,13 +3209,13 @@
           <a:p>
             <a:pPr algn="ctr"/>
             <a:r>
-              <a:rPr sz="2000" b="0" i="1">
-                <a:solidFill>
-                  <a:srgbClr val="8C8C8C"/>
+              <a:rPr sz="4800" b="1" i="0">
+                <a:solidFill>
+                  <a:srgbClr val="FFFFFF"/>
                 </a:solidFill>
                 <a:latin typeface="Arial"/>
               </a:rPr>
-              <a:t/>
+              <a:t>求めるものは   すべて主にある</a:t>
             </a:r>
           </a:p>
         </p:txBody>
@@ -3228,8 +3228,8 @@
         </p:nvSpPr>
         <p:spPr>
           <a:xfrm>
-            <a:off x="594360" y="3529584"/>
-            <a:ext cx="11002975" cy="685800"/>
+            <a:off x="640080" y="3753612"/>
+            <a:ext cx="10911535" cy="365760"/>
           </a:xfrm>
           <a:prstGeom prst="rect">
             <a:avLst/>
@@ -3244,13 +3244,13 @@
           <a:p>
             <a:pPr algn="ctr"/>
             <a:r>
-              <a:rPr sz="4400" b="1" i="0">
-                <a:solidFill>
-                  <a:srgbClr val="FFFFFF"/>
+              <a:rPr sz="2400" b="0" i="1">
+                <a:solidFill>
+                  <a:srgbClr val="AAAAAA"/>
                 </a:solidFill>
                 <a:latin typeface="Arial"/>
               </a:rPr>
-              <a:t>求めるものは   すべて主にある</a:t>
+              <a:t>motomeru mono wa subete shu ni aru</a:t>
             </a:r>
           </a:p>
         </p:txBody>
@@ -3263,8 +3263,8 @@
         </p:nvSpPr>
         <p:spPr>
           <a:xfrm>
-            <a:off x="594360" y="4251960"/>
-            <a:ext cx="11002975" cy="384048"/>
+            <a:off x="640080" y="4530852"/>
+            <a:ext cx="10911535" cy="310896"/>
           </a:xfrm>
           <a:prstGeom prst="rect">
             <a:avLst/>
@@ -3279,13 +3279,13 @@
           <a:p>
             <a:pPr algn="ctr"/>
             <a:r>
-              <a:rPr sz="2400" b="0" i="1">
-                <a:solidFill>
-                  <a:srgbClr val="B4B4B4"/>
+              <a:rPr sz="2000" b="0" i="1">
+                <a:solidFill>
+                  <a:srgbClr val="828282"/>
                 </a:solidFill>
                 <a:latin typeface="Arial"/>
               </a:rPr>
-              <a:t>motomeru mono wa subete shu ni aru</a:t>
+              <a:t>Ouço o Salvador dizer:</a:t>
             </a:r>
           </a:p>
         </p:txBody>
@@ -3298,8 +3298,8 @@
         </p:nvSpPr>
         <p:spPr>
           <a:xfrm>
-            <a:off x="594360" y="4672584"/>
-            <a:ext cx="11002975" cy="347472"/>
+            <a:off x="640080" y="4896612"/>
+            <a:ext cx="10911535" cy="310896"/>
           </a:xfrm>
           <a:prstGeom prst="rect">
             <a:avLst/>
@@ -3316,11 +3316,11 @@
             <a:r>
               <a:rPr sz="2000" b="0" i="1">
                 <a:solidFill>
-                  <a:srgbClr val="8C8C8C"/>
+                  <a:srgbClr val="828282"/>
                 </a:solidFill>
                 <a:latin typeface="Arial"/>
               </a:rPr>
-              <a:t/>
+              <a:t>"Tua força é tão pequena;</a:t>
             </a:r>
           </a:p>
         </p:txBody>
@@ -3359,8 +3359,8 @@
         </p:nvSpPr>
         <p:spPr>
           <a:xfrm>
-            <a:off x="594360" y="1837944"/>
-            <a:ext cx="11002975" cy="685800"/>
+            <a:off x="640080" y="1650492"/>
+            <a:ext cx="10911535" cy="731520"/>
           </a:xfrm>
           <a:prstGeom prst="rect">
             <a:avLst/>
@@ -3375,7 +3375,7 @@
           <a:p>
             <a:pPr algn="ctr"/>
             <a:r>
-              <a:rPr sz="4400" b="1" i="0">
+              <a:rPr sz="4800" b="1" i="0">
                 <a:solidFill>
                   <a:srgbClr val="FFFFFF"/>
                 </a:solidFill>
@@ -3394,8 +3394,8 @@
         </p:nvSpPr>
         <p:spPr>
           <a:xfrm>
-            <a:off x="594360" y="2560320"/>
-            <a:ext cx="11002975" cy="384048"/>
+            <a:off x="640080" y="2418588"/>
+            <a:ext cx="10911535" cy="365760"/>
           </a:xfrm>
           <a:prstGeom prst="rect">
             <a:avLst/>
@@ -3412,7 +3412,7 @@
             <a:r>
               <a:rPr sz="2400" b="0" i="1">
                 <a:solidFill>
-                  <a:srgbClr val="B4B4B4"/>
+                  <a:srgbClr val="AAAAAA"/>
                 </a:solidFill>
                 <a:latin typeface="Arial"/>
               </a:rPr>
@@ -3429,8 +3429,8 @@
         </p:nvSpPr>
         <p:spPr>
           <a:xfrm>
-            <a:off x="594360" y="2980944"/>
-            <a:ext cx="11002975" cy="347472"/>
+            <a:off x="640080" y="2985516"/>
+            <a:ext cx="10911535" cy="731520"/>
           </a:xfrm>
           <a:prstGeom prst="rect">
             <a:avLst/>
@@ -3445,13 +3445,13 @@
           <a:p>
             <a:pPr algn="ctr"/>
             <a:r>
-              <a:rPr sz="2000" b="0" i="1">
-                <a:solidFill>
-                  <a:srgbClr val="8C8C8C"/>
+              <a:rPr sz="4800" b="1" i="0">
+                <a:solidFill>
+                  <a:srgbClr val="FFFFFF"/>
                 </a:solidFill>
                 <a:latin typeface="Arial"/>
               </a:rPr>
-              <a:t/>
+              <a:t>罪のけがれも   白くされし</a:t>
             </a:r>
           </a:p>
         </p:txBody>
@@ -3464,8 +3464,8 @@
         </p:nvSpPr>
         <p:spPr>
           <a:xfrm>
-            <a:off x="594360" y="3529584"/>
-            <a:ext cx="11002975" cy="685800"/>
+            <a:off x="640080" y="3753612"/>
+            <a:ext cx="10911535" cy="365760"/>
           </a:xfrm>
           <a:prstGeom prst="rect">
             <a:avLst/>
@@ -3480,13 +3480,13 @@
           <a:p>
             <a:pPr algn="ctr"/>
             <a:r>
-              <a:rPr sz="4400" b="1" i="0">
-                <a:solidFill>
-                  <a:srgbClr val="FFFFFF"/>
+              <a:rPr sz="2400" b="0" i="1">
+                <a:solidFill>
+                  <a:srgbClr val="AAAAAA"/>
                 </a:solidFill>
                 <a:latin typeface="Arial"/>
               </a:rPr>
-              <a:t>罪のけがれも   白くされし</a:t>
+              <a:t>tsumi no kegaremo shiroku sareshi</a:t>
             </a:r>
           </a:p>
         </p:txBody>
@@ -3499,8 +3499,8 @@
         </p:nvSpPr>
         <p:spPr>
           <a:xfrm>
-            <a:off x="594360" y="4251960"/>
-            <a:ext cx="11002975" cy="384048"/>
+            <a:off x="640080" y="4530852"/>
+            <a:ext cx="10911535" cy="310896"/>
           </a:xfrm>
           <a:prstGeom prst="rect">
             <a:avLst/>
@@ -3515,13 +3515,13 @@
           <a:p>
             <a:pPr algn="ctr"/>
             <a:r>
-              <a:rPr sz="2400" b="0" i="1">
-                <a:solidFill>
-                  <a:srgbClr val="B4B4B4"/>
+              <a:rPr sz="2000" b="0" i="1">
+                <a:solidFill>
+                  <a:srgbClr val="828282"/>
                 </a:solidFill>
                 <a:latin typeface="Arial"/>
               </a:rPr>
-              <a:t>tsumi no kegaremo shiroku sareshi</a:t>
+              <a:t>Fraco filho, vigia e ora,</a:t>
             </a:r>
           </a:p>
         </p:txBody>
@@ -3534,8 +3534,8 @@
         </p:nvSpPr>
         <p:spPr>
           <a:xfrm>
-            <a:off x="594360" y="4672584"/>
-            <a:ext cx="11002975" cy="347472"/>
+            <a:off x="640080" y="4896612"/>
+            <a:ext cx="10911535" cy="310896"/>
           </a:xfrm>
           <a:prstGeom prst="rect">
             <a:avLst/>
@@ -3552,11 +3552,11 @@
             <a:r>
               <a:rPr sz="2000" b="0" i="1">
                 <a:solidFill>
-                  <a:srgbClr val="8C8C8C"/>
+                  <a:srgbClr val="828282"/>
                 </a:solidFill>
                 <a:latin typeface="Arial"/>
               </a:rPr>
-              <a:t/>
+              <a:t>Encontra em Mim teu tudo"</a:t>
             </a:r>
           </a:p>
         </p:txBody>
@@ -3595,8 +3595,8 @@
         </p:nvSpPr>
         <p:spPr>
           <a:xfrm>
-            <a:off x="594360" y="2258568"/>
-            <a:ext cx="11002975" cy="685800"/>
+            <a:off x="640080" y="2052828"/>
+            <a:ext cx="10911535" cy="731520"/>
           </a:xfrm>
           <a:prstGeom prst="rect">
             <a:avLst/>
@@ -3611,7 +3611,7 @@
           <a:p>
             <a:pPr algn="ctr"/>
             <a:r>
-              <a:rPr sz="4400" b="1" i="0">
+              <a:rPr sz="4800" b="1" i="0">
                 <a:solidFill>
                   <a:srgbClr val="FFFFFF"/>
                 </a:solidFill>
@@ -3630,8 +3630,8 @@
         </p:nvSpPr>
         <p:spPr>
           <a:xfrm>
-            <a:off x="594360" y="2980944"/>
-            <a:ext cx="11002975" cy="347472"/>
+            <a:off x="640080" y="2985516"/>
+            <a:ext cx="10911535" cy="731520"/>
           </a:xfrm>
           <a:prstGeom prst="rect">
             <a:avLst/>
@@ -3646,83 +3646,13 @@
           <a:p>
             <a:pPr algn="ctr"/>
             <a:r>
-              <a:rPr sz="2200" b="0" i="1">
-                <a:solidFill>
-                  <a:srgbClr val="8C8C8C"/>
-                </a:solidFill>
-                <a:latin typeface="Arial"/>
-              </a:rPr>
-              <a:t/>
-            </a:r>
-          </a:p>
-        </p:txBody>
-      </p:sp>
-      <p:sp>
-        <p:nvSpPr>
-          <p:cNvPr id="4" name="TextBox 3"/>
-          <p:cNvSpPr txBox="1"/>
-          <p:nvPr/>
-        </p:nvSpPr>
-        <p:spPr>
-          <a:xfrm>
-            <a:off x="594360" y="3529584"/>
-            <a:ext cx="11002975" cy="685800"/>
-          </a:xfrm>
-          <a:prstGeom prst="rect">
-            <a:avLst/>
-          </a:prstGeom>
-          <a:noFill/>
-        </p:spPr>
-        <p:txBody>
-          <a:bodyPr wrap="square">
-            <a:spAutoFit/>
-          </a:bodyPr>
-          <a:lstStyle/>
-          <a:p>
-            <a:pPr algn="ctr"/>
-            <a:r>
-              <a:rPr sz="4400" b="1" i="0">
+              <a:rPr sz="4800" b="1" i="0">
                 <a:solidFill>
                   <a:srgbClr val="FFFFFF"/>
                 </a:solidFill>
                 <a:latin typeface="Arial"/>
               </a:rPr>
               <a:t>Teu poder e somente Teu</a:t>
-            </a:r>
-          </a:p>
-        </p:txBody>
-      </p:sp>
-      <p:sp>
-        <p:nvSpPr>
-          <p:cNvPr id="5" name="TextBox 4"/>
-          <p:cNvSpPr txBox="1"/>
-          <p:nvPr/>
-        </p:nvSpPr>
-        <p:spPr>
-          <a:xfrm>
-            <a:off x="594360" y="4251960"/>
-            <a:ext cx="11002975" cy="347472"/>
-          </a:xfrm>
-          <a:prstGeom prst="rect">
-            <a:avLst/>
-          </a:prstGeom>
-          <a:noFill/>
-        </p:spPr>
-        <p:txBody>
-          <a:bodyPr wrap="square">
-            <a:spAutoFit/>
-          </a:bodyPr>
-          <a:lstStyle/>
-          <a:p>
-            <a:pPr algn="ctr"/>
-            <a:r>
-              <a:rPr sz="2200" b="0" i="1">
-                <a:solidFill>
-                  <a:srgbClr val="8C8C8C"/>
-                </a:solidFill>
-                <a:latin typeface="Arial"/>
-              </a:rPr>
-              <a:t/>
             </a:r>
           </a:p>
         </p:txBody>
@@ -3761,8 +3691,8 @@
         </p:nvSpPr>
         <p:spPr>
           <a:xfrm>
-            <a:off x="594360" y="2258568"/>
-            <a:ext cx="11002975" cy="685800"/>
+            <a:off x="640080" y="2052828"/>
+            <a:ext cx="10911535" cy="731520"/>
           </a:xfrm>
           <a:prstGeom prst="rect">
             <a:avLst/>
@@ -3777,7 +3707,7 @@
           <a:p>
             <a:pPr algn="ctr"/>
             <a:r>
-              <a:rPr sz="4400" b="1" i="0">
+              <a:rPr sz="4800" b="1" i="0">
                 <a:solidFill>
                   <a:srgbClr val="FFFFFF"/>
                 </a:solidFill>
@@ -3796,8 +3726,8 @@
         </p:nvSpPr>
         <p:spPr>
           <a:xfrm>
-            <a:off x="594360" y="2980944"/>
-            <a:ext cx="11002975" cy="347472"/>
+            <a:off x="640080" y="2985516"/>
+            <a:ext cx="10911535" cy="731520"/>
           </a:xfrm>
           <a:prstGeom prst="rect">
             <a:avLst/>
@@ -3812,83 +3742,13 @@
           <a:p>
             <a:pPr algn="ctr"/>
             <a:r>
-              <a:rPr sz="2200" b="0" i="1">
-                <a:solidFill>
-                  <a:srgbClr val="8C8C8C"/>
-                </a:solidFill>
-                <a:latin typeface="Arial"/>
-              </a:rPr>
-              <a:t/>
-            </a:r>
-          </a:p>
-        </p:txBody>
-      </p:sp>
-      <p:sp>
-        <p:nvSpPr>
-          <p:cNvPr id="4" name="TextBox 3"/>
-          <p:cNvSpPr txBox="1"/>
-          <p:nvPr/>
-        </p:nvSpPr>
-        <p:spPr>
-          <a:xfrm>
-            <a:off x="594360" y="3529584"/>
-            <a:ext cx="11002975" cy="685800"/>
-          </a:xfrm>
-          <a:prstGeom prst="rect">
-            <a:avLst/>
-          </a:prstGeom>
-          <a:noFill/>
-        </p:spPr>
-        <p:txBody>
-          <a:bodyPr wrap="square">
-            <a:spAutoFit/>
-          </a:bodyPr>
-          <a:lstStyle/>
-          <a:p>
-            <a:pPr algn="ctr"/>
-            <a:r>
-              <a:rPr sz="4400" b="1" i="0">
+              <a:rPr sz="4800" b="1" i="0">
                 <a:solidFill>
                   <a:srgbClr val="FFFFFF"/>
                 </a:solidFill>
                 <a:latin typeface="Arial"/>
               </a:rPr>
               <a:t>Encontra em Mim teu tudo"</a:t>
-            </a:r>
-          </a:p>
-        </p:txBody>
-      </p:sp>
-      <p:sp>
-        <p:nvSpPr>
-          <p:cNvPr id="5" name="TextBox 4"/>
-          <p:cNvSpPr txBox="1"/>
-          <p:nvPr/>
-        </p:nvSpPr>
-        <p:spPr>
-          <a:xfrm>
-            <a:off x="594360" y="4251960"/>
-            <a:ext cx="11002975" cy="347472"/>
-          </a:xfrm>
-          <a:prstGeom prst="rect">
-            <a:avLst/>
-          </a:prstGeom>
-          <a:noFill/>
-        </p:spPr>
-        <p:txBody>
-          <a:bodyPr wrap="square">
-            <a:spAutoFit/>
-          </a:bodyPr>
-          <a:lstStyle/>
-          <a:p>
-            <a:pPr algn="ctr"/>
-            <a:r>
-              <a:rPr sz="2200" b="0" i="1">
-                <a:solidFill>
-                  <a:srgbClr val="8C8C8C"/>
-                </a:solidFill>
-                <a:latin typeface="Arial"/>
-              </a:rPr>
-              <a:t/>
             </a:r>
           </a:p>
         </p:txBody>
@@ -3927,8 +3787,8 @@
         </p:nvSpPr>
         <p:spPr>
           <a:xfrm>
-            <a:off x="594360" y="2258568"/>
-            <a:ext cx="11002975" cy="685800"/>
+            <a:off x="640080" y="2052828"/>
+            <a:ext cx="10911535" cy="731520"/>
           </a:xfrm>
           <a:prstGeom prst="rect">
             <a:avLst/>
@@ -3943,7 +3803,7 @@
           <a:p>
             <a:pPr algn="ctr"/>
             <a:r>
-              <a:rPr sz="4400" b="1" i="0">
+              <a:rPr sz="4800" b="1" i="0">
                 <a:solidFill>
                   <a:srgbClr val="FFFFFF"/>
                 </a:solidFill>
@@ -3962,8 +3822,8 @@
         </p:nvSpPr>
         <p:spPr>
           <a:xfrm>
-            <a:off x="594360" y="2980944"/>
-            <a:ext cx="11002975" cy="347472"/>
+            <a:off x="640080" y="2985516"/>
+            <a:ext cx="10911535" cy="731520"/>
           </a:xfrm>
           <a:prstGeom prst="rect">
             <a:avLst/>
@@ -3978,83 +3838,13 @@
           <a:p>
             <a:pPr algn="ctr"/>
             <a:r>
-              <a:rPr sz="2200" b="0" i="1">
-                <a:solidFill>
-                  <a:srgbClr val="8C8C8C"/>
-                </a:solidFill>
-                <a:latin typeface="Arial"/>
-              </a:rPr>
-              <a:t/>
-            </a:r>
-          </a:p>
-        </p:txBody>
-      </p:sp>
-      <p:sp>
-        <p:nvSpPr>
-          <p:cNvPr id="4" name="TextBox 3"/>
-          <p:cNvSpPr txBox="1"/>
-          <p:nvPr/>
-        </p:nvSpPr>
-        <p:spPr>
-          <a:xfrm>
-            <a:off x="594360" y="3529584"/>
-            <a:ext cx="11002975" cy="685800"/>
-          </a:xfrm>
-          <a:prstGeom prst="rect">
-            <a:avLst/>
-          </a:prstGeom>
-          <a:noFill/>
-        </p:spPr>
-        <p:txBody>
-          <a:bodyPr wrap="square">
-            <a:spAutoFit/>
-          </a:bodyPr>
-          <a:lstStyle/>
-          <a:p>
-            <a:pPr algn="ctr"/>
-            <a:r>
-              <a:rPr sz="4400" b="1" i="0">
+              <a:rPr sz="4800" b="1" i="0">
                 <a:solidFill>
                   <a:srgbClr val="FFFFFF"/>
                 </a:solidFill>
                 <a:latin typeface="Arial"/>
               </a:rPr>
               <a:t>Tudo a Ele eu devo</a:t>
-            </a:r>
-          </a:p>
-        </p:txBody>
-      </p:sp>
-      <p:sp>
-        <p:nvSpPr>
-          <p:cNvPr id="5" name="TextBox 4"/>
-          <p:cNvSpPr txBox="1"/>
-          <p:nvPr/>
-        </p:nvSpPr>
-        <p:spPr>
-          <a:xfrm>
-            <a:off x="594360" y="4251960"/>
-            <a:ext cx="11002975" cy="347472"/>
-          </a:xfrm>
-          <a:prstGeom prst="rect">
-            <a:avLst/>
-          </a:prstGeom>
-          <a:noFill/>
-        </p:spPr>
-        <p:txBody>
-          <a:bodyPr wrap="square">
-            <a:spAutoFit/>
-          </a:bodyPr>
-          <a:lstStyle/>
-          <a:p>
-            <a:pPr algn="ctr"/>
-            <a:r>
-              <a:rPr sz="2200" b="0" i="1">
-                <a:solidFill>
-                  <a:srgbClr val="8C8C8C"/>
-                </a:solidFill>
-                <a:latin typeface="Arial"/>
-              </a:rPr>
-              <a:t/>
             </a:r>
           </a:p>
         </p:txBody>
@@ -4093,8 +3883,8 @@
         </p:nvSpPr>
         <p:spPr>
           <a:xfrm>
-            <a:off x="594360" y="2258568"/>
-            <a:ext cx="11002975" cy="685800"/>
+            <a:off x="640080" y="2052828"/>
+            <a:ext cx="10911535" cy="731520"/>
           </a:xfrm>
           <a:prstGeom prst="rect">
             <a:avLst/>
@@ -4109,7 +3899,7 @@
           <a:p>
             <a:pPr algn="ctr"/>
             <a:r>
-              <a:rPr sz="4400" b="1" i="0">
+              <a:rPr sz="4800" b="1" i="0">
                 <a:solidFill>
                   <a:srgbClr val="FFFFFF"/>
                 </a:solidFill>
@@ -4128,8 +3918,8 @@
         </p:nvSpPr>
         <p:spPr>
           <a:xfrm>
-            <a:off x="594360" y="2980944"/>
-            <a:ext cx="11002975" cy="347472"/>
+            <a:off x="640080" y="2985516"/>
+            <a:ext cx="10911535" cy="731520"/>
           </a:xfrm>
           <a:prstGeom prst="rect">
             <a:avLst/>
@@ -4144,83 +3934,13 @@
           <a:p>
             <a:pPr algn="ctr"/>
             <a:r>
-              <a:rPr sz="2200" b="0" i="1">
-                <a:solidFill>
-                  <a:srgbClr val="8C8C8C"/>
-                </a:solidFill>
-                <a:latin typeface="Arial"/>
-              </a:rPr>
-              <a:t/>
-            </a:r>
-          </a:p>
-        </p:txBody>
-      </p:sp>
-      <p:sp>
-        <p:nvSpPr>
-          <p:cNvPr id="4" name="TextBox 3"/>
-          <p:cNvSpPr txBox="1"/>
-          <p:nvPr/>
-        </p:nvSpPr>
-        <p:spPr>
-          <a:xfrm>
-            <a:off x="594360" y="3529584"/>
-            <a:ext cx="11002975" cy="685800"/>
-          </a:xfrm>
-          <a:prstGeom prst="rect">
-            <a:avLst/>
-          </a:prstGeom>
-          <a:noFill/>
-        </p:spPr>
-        <p:txBody>
-          <a:bodyPr wrap="square">
-            <a:spAutoFit/>
-          </a:bodyPr>
-          <a:lstStyle/>
-          <a:p>
-            <a:pPr algn="ctr"/>
-            <a:r>
-              <a:rPr sz="4400" b="1" i="0">
+              <a:rPr sz="4800" b="1" i="0">
                 <a:solidFill>
                   <a:srgbClr val="FFFFFF"/>
                 </a:solidFill>
                 <a:latin typeface="Arial"/>
               </a:rPr>
               <a:t>E ao leproso pode purificar</a:t>
-            </a:r>
-          </a:p>
-        </p:txBody>
-      </p:sp>
-      <p:sp>
-        <p:nvSpPr>
-          <p:cNvPr id="5" name="TextBox 4"/>
-          <p:cNvSpPr txBox="1"/>
-          <p:nvPr/>
-        </p:nvSpPr>
-        <p:spPr>
-          <a:xfrm>
-            <a:off x="594360" y="4251960"/>
-            <a:ext cx="11002975" cy="347472"/>
-          </a:xfrm>
-          <a:prstGeom prst="rect">
-            <a:avLst/>
-          </a:prstGeom>
-          <a:noFill/>
-        </p:spPr>
-        <p:txBody>
-          <a:bodyPr wrap="square">
-            <a:spAutoFit/>
-          </a:bodyPr>
-          <a:lstStyle/>
-          <a:p>
-            <a:pPr algn="ctr"/>
-            <a:r>
-              <a:rPr sz="2200" b="0" i="1">
-                <a:solidFill>
-                  <a:srgbClr val="8C8C8C"/>
-                </a:solidFill>
-                <a:latin typeface="Arial"/>
-              </a:rPr>
-              <a:t/>
             </a:r>
           </a:p>
         </p:txBody>
@@ -4259,8 +3979,8 @@
         </p:nvSpPr>
         <p:spPr>
           <a:xfrm>
-            <a:off x="594360" y="2258568"/>
-            <a:ext cx="11002975" cy="685800"/>
+            <a:off x="640080" y="2052828"/>
+            <a:ext cx="10911535" cy="731520"/>
           </a:xfrm>
           <a:prstGeom prst="rect">
             <a:avLst/>
@@ -4275,7 +3995,7 @@
           <a:p>
             <a:pPr algn="ctr"/>
             <a:r>
-              <a:rPr sz="4400" b="1" i="0">
+              <a:rPr sz="4800" b="1" i="0">
                 <a:solidFill>
                   <a:srgbClr val="FFFFFF"/>
                 </a:solidFill>
@@ -4294,8 +4014,8 @@
         </p:nvSpPr>
         <p:spPr>
           <a:xfrm>
-            <a:off x="594360" y="2980944"/>
-            <a:ext cx="11002975" cy="347472"/>
+            <a:off x="640080" y="2985516"/>
+            <a:ext cx="10911535" cy="731520"/>
           </a:xfrm>
           <a:prstGeom prst="rect">
             <a:avLst/>
@@ -4310,83 +4030,13 @@
           <a:p>
             <a:pPr algn="ctr"/>
             <a:r>
-              <a:rPr sz="2200" b="0" i="1">
-                <a:solidFill>
-                  <a:srgbClr val="8C8C8C"/>
-                </a:solidFill>
-                <a:latin typeface="Arial"/>
-              </a:rPr>
-              <a:t/>
-            </a:r>
-          </a:p>
-        </p:txBody>
-      </p:sp>
-      <p:sp>
-        <p:nvSpPr>
-          <p:cNvPr id="4" name="TextBox 3"/>
-          <p:cNvSpPr txBox="1"/>
-          <p:nvPr/>
-        </p:nvSpPr>
-        <p:spPr>
-          <a:xfrm>
-            <a:off x="594360" y="3529584"/>
-            <a:ext cx="11002975" cy="685800"/>
-          </a:xfrm>
-          <a:prstGeom prst="rect">
-            <a:avLst/>
-          </a:prstGeom>
-          <a:noFill/>
-        </p:spPr>
-        <p:txBody>
-          <a:bodyPr wrap="square">
-            <a:spAutoFit/>
-          </a:bodyPr>
-          <a:lstStyle/>
-          <a:p>
-            <a:pPr algn="ctr"/>
-            <a:r>
-              <a:rPr sz="4400" b="1" i="0">
+              <a:rPr sz="4800" b="1" i="0">
                 <a:solidFill>
                   <a:srgbClr val="FFFFFF"/>
                 </a:solidFill>
                 <a:latin typeface="Arial"/>
               </a:rPr>
               <a:t>Tudo a Ele eu devo</a:t>
-            </a:r>
-          </a:p>
-        </p:txBody>
-      </p:sp>
-      <p:sp>
-        <p:nvSpPr>
-          <p:cNvPr id="5" name="TextBox 4"/>
-          <p:cNvSpPr txBox="1"/>
-          <p:nvPr/>
-        </p:nvSpPr>
-        <p:spPr>
-          <a:xfrm>
-            <a:off x="594360" y="4251960"/>
-            <a:ext cx="11002975" cy="347472"/>
-          </a:xfrm>
-          <a:prstGeom prst="rect">
-            <a:avLst/>
-          </a:prstGeom>
-          <a:noFill/>
-        </p:spPr>
-        <p:txBody>
-          <a:bodyPr wrap="square">
-            <a:spAutoFit/>
-          </a:bodyPr>
-          <a:lstStyle/>
-          <a:p>
-            <a:pPr algn="ctr"/>
-            <a:r>
-              <a:rPr sz="2200" b="0" i="1">
-                <a:solidFill>
-                  <a:srgbClr val="8C8C8C"/>
-                </a:solidFill>
-                <a:latin typeface="Arial"/>
-              </a:rPr>
-              <a:t/>
             </a:r>
           </a:p>
         </p:txBody>
@@ -4425,8 +4075,8 @@
         </p:nvSpPr>
         <p:spPr>
           <a:xfrm>
-            <a:off x="594360" y="2258568"/>
-            <a:ext cx="11002975" cy="685800"/>
+            <a:off x="640080" y="2052828"/>
+            <a:ext cx="10911535" cy="731520"/>
           </a:xfrm>
           <a:prstGeom prst="rect">
             <a:avLst/>
@@ -4441,7 +4091,7 @@
           <a:p>
             <a:pPr algn="ctr"/>
             <a:r>
-              <a:rPr sz="4400" b="1" i="0">
+              <a:rPr sz="4800" b="1" i="0">
                 <a:solidFill>
                   <a:srgbClr val="FFFFFF"/>
                 </a:solidFill>
@@ -4460,8 +4110,8 @@
         </p:nvSpPr>
         <p:spPr>
           <a:xfrm>
-            <a:off x="594360" y="2980944"/>
-            <a:ext cx="11002975" cy="347472"/>
+            <a:off x="640080" y="2985516"/>
+            <a:ext cx="10911535" cy="731520"/>
           </a:xfrm>
           <a:prstGeom prst="rect">
             <a:avLst/>
@@ -4476,83 +4126,13 @@
           <a:p>
             <a:pPr algn="ctr"/>
             <a:r>
-              <a:rPr sz="2200" b="0" i="1">
-                <a:solidFill>
-                  <a:srgbClr val="8C8C8C"/>
-                </a:solidFill>
-                <a:latin typeface="Arial"/>
-              </a:rPr>
-              <a:t/>
-            </a:r>
-          </a:p>
-        </p:txBody>
-      </p:sp>
-      <p:sp>
-        <p:nvSpPr>
-          <p:cNvPr id="4" name="TextBox 3"/>
-          <p:cNvSpPr txBox="1"/>
-          <p:nvPr/>
-        </p:nvSpPr>
-        <p:spPr>
-          <a:xfrm>
-            <a:off x="594360" y="3529584"/>
-            <a:ext cx="11002975" cy="685800"/>
-          </a:xfrm>
-          <a:prstGeom prst="rect">
-            <a:avLst/>
-          </a:prstGeom>
-          <a:noFill/>
-        </p:spPr>
-        <p:txBody>
-          <a:bodyPr wrap="square">
-            <a:spAutoFit/>
-          </a:bodyPr>
-          <a:lstStyle/>
-          <a:p>
-            <a:pPr algn="ctr"/>
-            <a:r>
-              <a:rPr sz="4400" b="1" i="0">
+              <a:rPr sz="4800" b="1" i="0">
                 <a:solidFill>
                   <a:srgbClr val="FFFFFF"/>
                 </a:solidFill>
                 <a:latin typeface="Arial"/>
               </a:rPr>
               <a:t>Ele me lavou branco como a neve</a:t>
-            </a:r>
-          </a:p>
-        </p:txBody>
-      </p:sp>
-      <p:sp>
-        <p:nvSpPr>
-          <p:cNvPr id="5" name="TextBox 4"/>
-          <p:cNvSpPr txBox="1"/>
-          <p:nvPr/>
-        </p:nvSpPr>
-        <p:spPr>
-          <a:xfrm>
-            <a:off x="594360" y="4251960"/>
-            <a:ext cx="11002975" cy="347472"/>
-          </a:xfrm>
-          <a:prstGeom prst="rect">
-            <a:avLst/>
-          </a:prstGeom>
-          <a:noFill/>
-        </p:spPr>
-        <p:txBody>
-          <a:bodyPr wrap="square">
-            <a:spAutoFit/>
-          </a:bodyPr>
-          <a:lstStyle/>
-          <a:p>
-            <a:pPr algn="ctr"/>
-            <a:r>
-              <a:rPr sz="2200" b="0" i="1">
-                <a:solidFill>
-                  <a:srgbClr val="8C8C8C"/>
-                </a:solidFill>
-                <a:latin typeface="Arial"/>
-              </a:rPr>
-              <a:t/>
             </a:r>
           </a:p>
         </p:txBody>
@@ -4591,8 +4171,8 @@
         </p:nvSpPr>
         <p:spPr>
           <a:xfrm>
-            <a:off x="594360" y="2258568"/>
-            <a:ext cx="11002975" cy="685800"/>
+            <a:off x="640080" y="2052828"/>
+            <a:ext cx="10911535" cy="731520"/>
           </a:xfrm>
           <a:prstGeom prst="rect">
             <a:avLst/>
@@ -4607,7 +4187,7 @@
           <a:p>
             <a:pPr algn="ctr"/>
             <a:r>
-              <a:rPr sz="4400" b="1" i="0">
+              <a:rPr sz="4800" b="1" i="0">
                 <a:solidFill>
                   <a:srgbClr val="FFFFFF"/>
                 </a:solidFill>
@@ -4626,8 +4206,8 @@
         </p:nvSpPr>
         <p:spPr>
           <a:xfrm>
-            <a:off x="594360" y="2980944"/>
-            <a:ext cx="11002975" cy="347472"/>
+            <a:off x="640080" y="2985516"/>
+            <a:ext cx="10911535" cy="731520"/>
           </a:xfrm>
           <a:prstGeom prst="rect">
             <a:avLst/>
@@ -4642,83 +4222,13 @@
           <a:p>
             <a:pPr algn="ctr"/>
             <a:r>
-              <a:rPr sz="2200" b="0" i="1">
-                <a:solidFill>
-                  <a:srgbClr val="8C8C8C"/>
-                </a:solidFill>
-                <a:latin typeface="Arial"/>
-              </a:rPr>
-              <a:t/>
-            </a:r>
-          </a:p>
-        </p:txBody>
-      </p:sp>
-      <p:sp>
-        <p:nvSpPr>
-          <p:cNvPr id="4" name="TextBox 3"/>
-          <p:cNvSpPr txBox="1"/>
-          <p:nvPr/>
-        </p:nvSpPr>
-        <p:spPr>
-          <a:xfrm>
-            <a:off x="594360" y="3529584"/>
-            <a:ext cx="11002975" cy="685800"/>
-          </a:xfrm>
-          <a:prstGeom prst="rect">
-            <a:avLst/>
-          </a:prstGeom>
-          <a:noFill/>
-        </p:spPr>
-        <p:txBody>
-          <a:bodyPr wrap="square">
-            <a:spAutoFit/>
-          </a:bodyPr>
-          <a:lstStyle/>
-          <a:p>
-            <a:pPr algn="ctr"/>
-            <a:r>
-              <a:rPr sz="3805" b="1" i="0">
+              <a:rPr sz="4100" b="1" i="0">
                 <a:solidFill>
                   <a:srgbClr val="FFFFFF"/>
                 </a:solidFill>
                 <a:latin typeface="Arial"/>
               </a:rPr>
               <a:t>"Jesus morreu para salvar minha alma"</a:t>
-            </a:r>
-          </a:p>
-        </p:txBody>
-      </p:sp>
-      <p:sp>
-        <p:nvSpPr>
-          <p:cNvPr id="5" name="TextBox 4"/>
-          <p:cNvSpPr txBox="1"/>
-          <p:nvPr/>
-        </p:nvSpPr>
-        <p:spPr>
-          <a:xfrm>
-            <a:off x="594360" y="4251960"/>
-            <a:ext cx="11002975" cy="347472"/>
-          </a:xfrm>
-          <a:prstGeom prst="rect">
-            <a:avLst/>
-          </a:prstGeom>
-          <a:noFill/>
-        </p:spPr>
-        <p:txBody>
-          <a:bodyPr wrap="square">
-            <a:spAutoFit/>
-          </a:bodyPr>
-          <a:lstStyle/>
-          <a:p>
-            <a:pPr algn="ctr"/>
-            <a:r>
-              <a:rPr sz="2200" b="0" i="1">
-                <a:solidFill>
-                  <a:srgbClr val="8C8C8C"/>
-                </a:solidFill>
-                <a:latin typeface="Arial"/>
-              </a:rPr>
-              <a:t/>
             </a:r>
           </a:p>
         </p:txBody>
@@ -4757,8 +4267,8 @@
         </p:nvSpPr>
         <p:spPr>
           <a:xfrm>
-            <a:off x="594360" y="2258568"/>
-            <a:ext cx="11002975" cy="685800"/>
+            <a:off x="640080" y="2052828"/>
+            <a:ext cx="10911535" cy="731520"/>
           </a:xfrm>
           <a:prstGeom prst="rect">
             <a:avLst/>
@@ -4773,7 +4283,7 @@
           <a:p>
             <a:pPr algn="ctr"/>
             <a:r>
-              <a:rPr sz="4400" b="1" i="0">
+              <a:rPr sz="4800" b="1" i="0">
                 <a:solidFill>
                   <a:srgbClr val="FFFFFF"/>
                 </a:solidFill>
@@ -4792,8 +4302,8 @@
         </p:nvSpPr>
         <p:spPr>
           <a:xfrm>
-            <a:off x="594360" y="2980944"/>
-            <a:ext cx="11002975" cy="347472"/>
+            <a:off x="640080" y="2985516"/>
+            <a:ext cx="10911535" cy="731520"/>
           </a:xfrm>
           <a:prstGeom prst="rect">
             <a:avLst/>
@@ -4808,83 +4318,13 @@
           <a:p>
             <a:pPr algn="ctr"/>
             <a:r>
-              <a:rPr sz="2200" b="0" i="1">
-                <a:solidFill>
-                  <a:srgbClr val="8C8C8C"/>
-                </a:solidFill>
-                <a:latin typeface="Arial"/>
-              </a:rPr>
-              <a:t/>
-            </a:r>
-          </a:p>
-        </p:txBody>
-      </p:sp>
-      <p:sp>
-        <p:nvSpPr>
-          <p:cNvPr id="4" name="TextBox 3"/>
-          <p:cNvSpPr txBox="1"/>
-          <p:nvPr/>
-        </p:nvSpPr>
-        <p:spPr>
-          <a:xfrm>
-            <a:off x="594360" y="3529584"/>
-            <a:ext cx="11002975" cy="685800"/>
-          </a:xfrm>
-          <a:prstGeom prst="rect">
-            <a:avLst/>
-          </a:prstGeom>
-          <a:noFill/>
-        </p:spPr>
-        <p:txBody>
-          <a:bodyPr wrap="square">
-            <a:spAutoFit/>
-          </a:bodyPr>
-          <a:lstStyle/>
-          <a:p>
-            <a:pPr algn="ctr"/>
-            <a:r>
-              <a:rPr sz="4400" b="1" i="0">
+              <a:rPr sz="4800" b="1" i="0">
                 <a:solidFill>
                   <a:srgbClr val="FFFFFF"/>
                 </a:solidFill>
                 <a:latin typeface="Arial"/>
               </a:rPr>
               <a:t>Jesus pagou tudo</a:t>
-            </a:r>
-          </a:p>
-        </p:txBody>
-      </p:sp>
-      <p:sp>
-        <p:nvSpPr>
-          <p:cNvPr id="5" name="TextBox 4"/>
-          <p:cNvSpPr txBox="1"/>
-          <p:nvPr/>
-        </p:nvSpPr>
-        <p:spPr>
-          <a:xfrm>
-            <a:off x="594360" y="4251960"/>
-            <a:ext cx="11002975" cy="347472"/>
-          </a:xfrm>
-          <a:prstGeom prst="rect">
-            <a:avLst/>
-          </a:prstGeom>
-          <a:noFill/>
-        </p:spPr>
-        <p:txBody>
-          <a:bodyPr wrap="square">
-            <a:spAutoFit/>
-          </a:bodyPr>
-          <a:lstStyle/>
-          <a:p>
-            <a:pPr algn="ctr"/>
-            <a:r>
-              <a:rPr sz="2200" b="0" i="1">
-                <a:solidFill>
-                  <a:srgbClr val="8C8C8C"/>
-                </a:solidFill>
-                <a:latin typeface="Arial"/>
-              </a:rPr>
-              <a:t/>
             </a:r>
           </a:p>
         </p:txBody>
@@ -4923,8 +4363,8 @@
         </p:nvSpPr>
         <p:spPr>
           <a:xfrm>
-            <a:off x="594360" y="1837944"/>
-            <a:ext cx="11002975" cy="685800"/>
+            <a:off x="640080" y="1650492"/>
+            <a:ext cx="10911535" cy="731520"/>
           </a:xfrm>
           <a:prstGeom prst="rect">
             <a:avLst/>
@@ -4939,7 +4379,7 @@
           <a:p>
             <a:pPr algn="ctr"/>
             <a:r>
-              <a:rPr sz="4400" b="1" i="0">
+              <a:rPr sz="4800" b="1" i="0">
                 <a:solidFill>
                   <a:srgbClr val="FFFFFF"/>
                 </a:solidFill>
@@ -4958,8 +4398,8 @@
         </p:nvSpPr>
         <p:spPr>
           <a:xfrm>
-            <a:off x="594360" y="2560320"/>
-            <a:ext cx="11002975" cy="384048"/>
+            <a:off x="640080" y="2418588"/>
+            <a:ext cx="10911535" cy="365760"/>
           </a:xfrm>
           <a:prstGeom prst="rect">
             <a:avLst/>
@@ -4976,7 +4416,7 @@
             <a:r>
               <a:rPr sz="2400" b="0" i="1">
                 <a:solidFill>
-                  <a:srgbClr val="B4B4B4"/>
+                  <a:srgbClr val="AAAAAA"/>
                 </a:solidFill>
                 <a:latin typeface="Arial"/>
               </a:rPr>
@@ -4993,8 +4433,8 @@
         </p:nvSpPr>
         <p:spPr>
           <a:xfrm>
-            <a:off x="594360" y="2980944"/>
-            <a:ext cx="11002975" cy="347472"/>
+            <a:off x="640080" y="2985516"/>
+            <a:ext cx="10911535" cy="731520"/>
           </a:xfrm>
           <a:prstGeom prst="rect">
             <a:avLst/>
@@ -5009,13 +4449,13 @@
           <a:p>
             <a:pPr algn="ctr"/>
             <a:r>
-              <a:rPr sz="2000" b="0" i="1">
-                <a:solidFill>
-                  <a:srgbClr val="8C8C8C"/>
+              <a:rPr sz="4800" b="1" i="0">
+                <a:solidFill>
+                  <a:srgbClr val="FFFFFF"/>
                 </a:solidFill>
                 <a:latin typeface="Arial"/>
               </a:rPr>
-              <a:t/>
+              <a:t>罪のけがれも   白くされし</a:t>
             </a:r>
           </a:p>
         </p:txBody>
@@ -5028,8 +4468,8 @@
         </p:nvSpPr>
         <p:spPr>
           <a:xfrm>
-            <a:off x="594360" y="3529584"/>
-            <a:ext cx="11002975" cy="685800"/>
+            <a:off x="640080" y="3753612"/>
+            <a:ext cx="10911535" cy="365760"/>
           </a:xfrm>
           <a:prstGeom prst="rect">
             <a:avLst/>
@@ -5044,13 +4484,13 @@
           <a:p>
             <a:pPr algn="ctr"/>
             <a:r>
-              <a:rPr sz="4400" b="1" i="0">
-                <a:solidFill>
-                  <a:srgbClr val="FFFFFF"/>
+              <a:rPr sz="2400" b="0" i="1">
+                <a:solidFill>
+                  <a:srgbClr val="AAAAAA"/>
                 </a:solidFill>
                 <a:latin typeface="Arial"/>
               </a:rPr>
-              <a:t>罪のけがれも   白くされし</a:t>
+              <a:t>tsumi no kegaremo shiroku sareshi</a:t>
             </a:r>
           </a:p>
         </p:txBody>
@@ -5063,8 +4503,8 @@
         </p:nvSpPr>
         <p:spPr>
           <a:xfrm>
-            <a:off x="594360" y="4251960"/>
-            <a:ext cx="11002975" cy="384048"/>
+            <a:off x="640080" y="4530852"/>
+            <a:ext cx="10911535" cy="310896"/>
           </a:xfrm>
           <a:prstGeom prst="rect">
             <a:avLst/>
@@ -5079,13 +4519,13 @@
           <a:p>
             <a:pPr algn="ctr"/>
             <a:r>
-              <a:rPr sz="2400" b="0" i="1">
-                <a:solidFill>
-                  <a:srgbClr val="B4B4B4"/>
+              <a:rPr sz="2000" b="0" i="1">
+                <a:solidFill>
+                  <a:srgbClr val="828282"/>
                 </a:solidFill>
                 <a:latin typeface="Arial"/>
               </a:rPr>
-              <a:t>tsumi no kegaremo shiroku sareshi</a:t>
+              <a:t>Fraco filho, vigia e ora,</a:t>
             </a:r>
           </a:p>
         </p:txBody>
@@ -5098,8 +4538,8 @@
         </p:nvSpPr>
         <p:spPr>
           <a:xfrm>
-            <a:off x="594360" y="4672584"/>
-            <a:ext cx="11002975" cy="347472"/>
+            <a:off x="640080" y="4896612"/>
+            <a:ext cx="10911535" cy="310896"/>
           </a:xfrm>
           <a:prstGeom prst="rect">
             <a:avLst/>
@@ -5116,11 +4556,11 @@
             <a:r>
               <a:rPr sz="2000" b="0" i="1">
                 <a:solidFill>
-                  <a:srgbClr val="8C8C8C"/>
+                  <a:srgbClr val="828282"/>
                 </a:solidFill>
                 <a:latin typeface="Arial"/>
               </a:rPr>
-              <a:t/>
+              <a:t>Encontra em Mim teu tudo"</a:t>
             </a:r>
           </a:p>
         </p:txBody>
@@ -5159,8 +4599,8 @@
         </p:nvSpPr>
         <p:spPr>
           <a:xfrm>
-            <a:off x="594360" y="1837944"/>
-            <a:ext cx="11002975" cy="685800"/>
+            <a:off x="640080" y="1650492"/>
+            <a:ext cx="10911535" cy="731520"/>
           </a:xfrm>
           <a:prstGeom prst="rect">
             <a:avLst/>
@@ -5175,7 +4615,7 @@
           <a:p>
             <a:pPr algn="ctr"/>
             <a:r>
-              <a:rPr sz="4400" b="1" i="0">
+              <a:rPr sz="4800" b="1" i="0">
                 <a:solidFill>
                   <a:srgbClr val="FFFFFF"/>
                 </a:solidFill>
@@ -5194,8 +4634,8 @@
         </p:nvSpPr>
         <p:spPr>
           <a:xfrm>
-            <a:off x="594360" y="2560320"/>
-            <a:ext cx="11002975" cy="384048"/>
+            <a:off x="640080" y="2418588"/>
+            <a:ext cx="10911535" cy="365760"/>
           </a:xfrm>
           <a:prstGeom prst="rect">
             <a:avLst/>
@@ -5212,7 +4652,7 @@
             <a:r>
               <a:rPr sz="2400" b="0" i="1">
                 <a:solidFill>
-                  <a:srgbClr val="B4B4B4"/>
+                  <a:srgbClr val="AAAAAA"/>
                 </a:solidFill>
                 <a:latin typeface="Arial"/>
               </a:rPr>
@@ -5229,8 +4669,8 @@
         </p:nvSpPr>
         <p:spPr>
           <a:xfrm>
-            <a:off x="594360" y="2980944"/>
-            <a:ext cx="11002975" cy="347472"/>
+            <a:off x="640080" y="2985516"/>
+            <a:ext cx="10911535" cy="731520"/>
           </a:xfrm>
           <a:prstGeom prst="rect">
             <a:avLst/>
@@ -5245,13 +4685,13 @@
           <a:p>
             <a:pPr algn="ctr"/>
             <a:r>
-              <a:rPr sz="2000" b="0" i="1">
-                <a:solidFill>
-                  <a:srgbClr val="8C8C8C"/>
+              <a:rPr sz="4800" b="1" i="0">
+                <a:solidFill>
+                  <a:srgbClr val="FFFFFF"/>
                 </a:solidFill>
                 <a:latin typeface="Arial"/>
               </a:rPr>
-              <a:t/>
+              <a:t>罪のけがれも   白くされし</a:t>
             </a:r>
           </a:p>
         </p:txBody>
@@ -5264,8 +4704,8 @@
         </p:nvSpPr>
         <p:spPr>
           <a:xfrm>
-            <a:off x="594360" y="3529584"/>
-            <a:ext cx="11002975" cy="685800"/>
+            <a:off x="640080" y="3753612"/>
+            <a:ext cx="10911535" cy="365760"/>
           </a:xfrm>
           <a:prstGeom prst="rect">
             <a:avLst/>
@@ -5280,13 +4720,13 @@
           <a:p>
             <a:pPr algn="ctr"/>
             <a:r>
-              <a:rPr sz="4400" b="1" i="0">
-                <a:solidFill>
-                  <a:srgbClr val="FFFFFF"/>
+              <a:rPr sz="2400" b="0" i="1">
+                <a:solidFill>
+                  <a:srgbClr val="AAAAAA"/>
                 </a:solidFill>
                 <a:latin typeface="Arial"/>
               </a:rPr>
-              <a:t>罪のけがれも   白くされし</a:t>
+              <a:t>tsumi no kegaremo shiroku sareshi</a:t>
             </a:r>
           </a:p>
         </p:txBody>
@@ -5299,8 +4739,8 @@
         </p:nvSpPr>
         <p:spPr>
           <a:xfrm>
-            <a:off x="594360" y="4251960"/>
-            <a:ext cx="11002975" cy="384048"/>
+            <a:off x="640080" y="4530852"/>
+            <a:ext cx="10911535" cy="310896"/>
           </a:xfrm>
           <a:prstGeom prst="rect">
             <a:avLst/>
@@ -5315,13 +4755,13 @@
           <a:p>
             <a:pPr algn="ctr"/>
             <a:r>
-              <a:rPr sz="2400" b="0" i="1">
-                <a:solidFill>
-                  <a:srgbClr val="B4B4B4"/>
+              <a:rPr sz="2000" b="0" i="1">
+                <a:solidFill>
+                  <a:srgbClr val="828282"/>
                 </a:solidFill>
                 <a:latin typeface="Arial"/>
               </a:rPr>
-              <a:t>tsumi no kegaremo shiroku sareshi</a:t>
+              <a:t>Fraco filho, vigia e ora,</a:t>
             </a:r>
           </a:p>
         </p:txBody>
@@ -5334,8 +4774,8 @@
         </p:nvSpPr>
         <p:spPr>
           <a:xfrm>
-            <a:off x="594360" y="4672584"/>
-            <a:ext cx="11002975" cy="347472"/>
+            <a:off x="640080" y="4896612"/>
+            <a:ext cx="10911535" cy="310896"/>
           </a:xfrm>
           <a:prstGeom prst="rect">
             <a:avLst/>
@@ -5352,11 +4792,11 @@
             <a:r>
               <a:rPr sz="2000" b="0" i="1">
                 <a:solidFill>
-                  <a:srgbClr val="8C8C8C"/>
+                  <a:srgbClr val="828282"/>
                 </a:solidFill>
                 <a:latin typeface="Arial"/>
               </a:rPr>
-              <a:t/>
+              <a:t>Encontra em Mim teu tudo"</a:t>
             </a:r>
           </a:p>
         </p:txBody>
@@ -5395,8 +4835,8 @@
         </p:nvSpPr>
         <p:spPr>
           <a:xfrm>
-            <a:off x="594360" y="2683764"/>
-            <a:ext cx="11002975" cy="685800"/>
+            <a:off x="640080" y="2500884"/>
+            <a:ext cx="10911535" cy="731520"/>
           </a:xfrm>
           <a:prstGeom prst="rect">
             <a:avLst/>
@@ -5411,7 +4851,7 @@
           <a:p>
             <a:pPr algn="ctr"/>
             <a:r>
-              <a:rPr sz="4400" b="1" i="0">
+              <a:rPr sz="4800" b="1" i="0">
                 <a:solidFill>
                   <a:srgbClr val="FFFFFF"/>
                 </a:solidFill>
@@ -5430,8 +4870,8 @@
         </p:nvSpPr>
         <p:spPr>
           <a:xfrm>
-            <a:off x="594360" y="3406140"/>
-            <a:ext cx="11002975" cy="384048"/>
+            <a:off x="640080" y="3268980"/>
+            <a:ext cx="10911535" cy="365760"/>
           </a:xfrm>
           <a:prstGeom prst="rect">
             <a:avLst/>
@@ -5448,7 +4888,7 @@
             <a:r>
               <a:rPr sz="2400" b="0" i="1">
                 <a:solidFill>
-                  <a:srgbClr val="B4B4B4"/>
+                  <a:srgbClr val="AAAAAA"/>
                 </a:solidFill>
                 <a:latin typeface="Arial"/>
               </a:rPr>
@@ -5465,8 +4905,8 @@
         </p:nvSpPr>
         <p:spPr>
           <a:xfrm>
-            <a:off x="594360" y="3826764"/>
-            <a:ext cx="11002975" cy="347472"/>
+            <a:off x="640080" y="4046220"/>
+            <a:ext cx="10911535" cy="310896"/>
           </a:xfrm>
           <a:prstGeom prst="rect">
             <a:avLst/>
@@ -5483,11 +4923,11 @@
             <a:r>
               <a:rPr sz="2000" b="0" i="1">
                 <a:solidFill>
-                  <a:srgbClr val="8C8C8C"/>
+                  <a:srgbClr val="828282"/>
                 </a:solidFill>
                 <a:latin typeface="Arial"/>
               </a:rPr>
-              <a:t/>
+              <a:t>Jesus pagou tudo</a:t>
             </a:r>
           </a:p>
         </p:txBody>
@@ -5526,8 +4966,8 @@
         </p:nvSpPr>
         <p:spPr>
           <a:xfrm>
-            <a:off x="594360" y="2258568"/>
-            <a:ext cx="11002975" cy="685800"/>
+            <a:off x="640080" y="2052828"/>
+            <a:ext cx="10911535" cy="731520"/>
           </a:xfrm>
           <a:prstGeom prst="rect">
             <a:avLst/>
@@ -5542,7 +4982,7 @@
           <a:p>
             <a:pPr algn="ctr"/>
             <a:r>
-              <a:rPr sz="4400" b="1" i="0">
+              <a:rPr sz="4800" b="1" i="0">
                 <a:solidFill>
                   <a:srgbClr val="FFFFFF"/>
                 </a:solidFill>
@@ -5561,8 +5001,8 @@
         </p:nvSpPr>
         <p:spPr>
           <a:xfrm>
-            <a:off x="594360" y="2980944"/>
-            <a:ext cx="11002975" cy="347472"/>
+            <a:off x="640080" y="2985516"/>
+            <a:ext cx="10911535" cy="731520"/>
           </a:xfrm>
           <a:prstGeom prst="rect">
             <a:avLst/>
@@ -5577,83 +5017,13 @@
           <a:p>
             <a:pPr algn="ctr"/>
             <a:r>
-              <a:rPr sz="2200" b="0" i="1">
-                <a:solidFill>
-                  <a:srgbClr val="8C8C8C"/>
-                </a:solidFill>
-                <a:latin typeface="Arial"/>
-              </a:rPr>
-              <a:t/>
-            </a:r>
-          </a:p>
-        </p:txBody>
-      </p:sp>
-      <p:sp>
-        <p:nvSpPr>
-          <p:cNvPr id="4" name="TextBox 3"/>
-          <p:cNvSpPr txBox="1"/>
-          <p:nvPr/>
-        </p:nvSpPr>
-        <p:spPr>
-          <a:xfrm>
-            <a:off x="594360" y="3529584"/>
-            <a:ext cx="11002975" cy="685800"/>
-          </a:xfrm>
-          <a:prstGeom prst="rect">
-            <a:avLst/>
-          </a:prstGeom>
-          <a:noFill/>
-        </p:spPr>
-        <p:txBody>
-          <a:bodyPr wrap="square">
-            <a:spAutoFit/>
-          </a:bodyPr>
-          <a:lstStyle/>
-          <a:p>
-            <a:pPr algn="ctr"/>
-            <a:r>
-              <a:rPr sz="4400" b="1" i="0">
+              <a:rPr sz="4800" b="1" i="0">
                 <a:solidFill>
                   <a:srgbClr val="FFFFFF"/>
                 </a:solidFill>
                 <a:latin typeface="Arial"/>
               </a:rPr>
               <a:t>"Tua força é tão pequena;</a:t>
-            </a:r>
-          </a:p>
-        </p:txBody>
-      </p:sp>
-      <p:sp>
-        <p:nvSpPr>
-          <p:cNvPr id="5" name="TextBox 4"/>
-          <p:cNvSpPr txBox="1"/>
-          <p:nvPr/>
-        </p:nvSpPr>
-        <p:spPr>
-          <a:xfrm>
-            <a:off x="594360" y="4251960"/>
-            <a:ext cx="11002975" cy="347472"/>
-          </a:xfrm>
-          <a:prstGeom prst="rect">
-            <a:avLst/>
-          </a:prstGeom>
-          <a:noFill/>
-        </p:spPr>
-        <p:txBody>
-          <a:bodyPr wrap="square">
-            <a:spAutoFit/>
-          </a:bodyPr>
-          <a:lstStyle/>
-          <a:p>
-            <a:pPr algn="ctr"/>
-            <a:r>
-              <a:rPr sz="2200" b="0" i="1">
-                <a:solidFill>
-                  <a:srgbClr val="8C8C8C"/>
-                </a:solidFill>
-                <a:latin typeface="Arial"/>
-              </a:rPr>
-              <a:t/>
             </a:r>
           </a:p>
         </p:txBody>
@@ -5692,8 +5062,8 @@
         </p:nvSpPr>
         <p:spPr>
           <a:xfrm>
-            <a:off x="594360" y="2258568"/>
-            <a:ext cx="11002975" cy="685800"/>
+            <a:off x="640080" y="2052828"/>
+            <a:ext cx="10911535" cy="731520"/>
           </a:xfrm>
           <a:prstGeom prst="rect">
             <a:avLst/>
@@ -5708,7 +5078,7 @@
           <a:p>
             <a:pPr algn="ctr"/>
             <a:r>
-              <a:rPr sz="4400" b="1" i="0">
+              <a:rPr sz="4800" b="1" i="0">
                 <a:solidFill>
                   <a:srgbClr val="FFFFFF"/>
                 </a:solidFill>
@@ -5727,8 +5097,8 @@
         </p:nvSpPr>
         <p:spPr>
           <a:xfrm>
-            <a:off x="594360" y="2980944"/>
-            <a:ext cx="11002975" cy="347472"/>
+            <a:off x="640080" y="2985516"/>
+            <a:ext cx="10911535" cy="731520"/>
           </a:xfrm>
           <a:prstGeom prst="rect">
             <a:avLst/>
@@ -5743,83 +5113,13 @@
           <a:p>
             <a:pPr algn="ctr"/>
             <a:r>
-              <a:rPr sz="2200" b="0" i="1">
-                <a:solidFill>
-                  <a:srgbClr val="8C8C8C"/>
-                </a:solidFill>
-                <a:latin typeface="Arial"/>
-              </a:rPr>
-              <a:t/>
-            </a:r>
-          </a:p>
-        </p:txBody>
-      </p:sp>
-      <p:sp>
-        <p:nvSpPr>
-          <p:cNvPr id="4" name="TextBox 3"/>
-          <p:cNvSpPr txBox="1"/>
-          <p:nvPr/>
-        </p:nvSpPr>
-        <p:spPr>
-          <a:xfrm>
-            <a:off x="594360" y="3529584"/>
-            <a:ext cx="11002975" cy="685800"/>
-          </a:xfrm>
-          <a:prstGeom prst="rect">
-            <a:avLst/>
-          </a:prstGeom>
-          <a:noFill/>
-        </p:spPr>
-        <p:txBody>
-          <a:bodyPr wrap="square">
-            <a:spAutoFit/>
-          </a:bodyPr>
-          <a:lstStyle/>
-          <a:p>
-            <a:pPr algn="ctr"/>
-            <a:r>
-              <a:rPr sz="4400" b="1" i="0">
+              <a:rPr sz="4800" b="1" i="0">
                 <a:solidFill>
                   <a:srgbClr val="FFFFFF"/>
                 </a:solidFill>
                 <a:latin typeface="Arial"/>
               </a:rPr>
               <a:t>Encontra em Mim teu tudo"</a:t>
-            </a:r>
-          </a:p>
-        </p:txBody>
-      </p:sp>
-      <p:sp>
-        <p:nvSpPr>
-          <p:cNvPr id="5" name="TextBox 4"/>
-          <p:cNvSpPr txBox="1"/>
-          <p:nvPr/>
-        </p:nvSpPr>
-        <p:spPr>
-          <a:xfrm>
-            <a:off x="594360" y="4251960"/>
-            <a:ext cx="11002975" cy="347472"/>
-          </a:xfrm>
-          <a:prstGeom prst="rect">
-            <a:avLst/>
-          </a:prstGeom>
-          <a:noFill/>
-        </p:spPr>
-        <p:txBody>
-          <a:bodyPr wrap="square">
-            <a:spAutoFit/>
-          </a:bodyPr>
-          <a:lstStyle/>
-          <a:p>
-            <a:pPr algn="ctr"/>
-            <a:r>
-              <a:rPr sz="2200" b="0" i="1">
-                <a:solidFill>
-                  <a:srgbClr val="8C8C8C"/>
-                </a:solidFill>
-                <a:latin typeface="Arial"/>
-              </a:rPr>
-              <a:t/>
             </a:r>
           </a:p>
         </p:txBody>
@@ -5858,8 +5158,8 @@
         </p:nvSpPr>
         <p:spPr>
           <a:xfrm>
-            <a:off x="594360" y="2258568"/>
-            <a:ext cx="11002975" cy="685800"/>
+            <a:off x="640080" y="2052828"/>
+            <a:ext cx="10911535" cy="731520"/>
           </a:xfrm>
           <a:prstGeom prst="rect">
             <a:avLst/>
@@ -5874,7 +5174,7 @@
           <a:p>
             <a:pPr algn="ctr"/>
             <a:r>
-              <a:rPr sz="4400" b="1" i="0">
+              <a:rPr sz="4800" b="1" i="0">
                 <a:solidFill>
                   <a:srgbClr val="FFFFFF"/>
                 </a:solidFill>
@@ -5893,8 +5193,8 @@
         </p:nvSpPr>
         <p:spPr>
           <a:xfrm>
-            <a:off x="594360" y="2980944"/>
-            <a:ext cx="11002975" cy="347472"/>
+            <a:off x="640080" y="2985516"/>
+            <a:ext cx="10911535" cy="731520"/>
           </a:xfrm>
           <a:prstGeom prst="rect">
             <a:avLst/>
@@ -5909,83 +5209,13 @@
           <a:p>
             <a:pPr algn="ctr"/>
             <a:r>
-              <a:rPr sz="2200" b="0" i="1">
-                <a:solidFill>
-                  <a:srgbClr val="8C8C8C"/>
-                </a:solidFill>
-                <a:latin typeface="Arial"/>
-              </a:rPr>
-              <a:t/>
-            </a:r>
-          </a:p>
-        </p:txBody>
-      </p:sp>
-      <p:sp>
-        <p:nvSpPr>
-          <p:cNvPr id="4" name="TextBox 3"/>
-          <p:cNvSpPr txBox="1"/>
-          <p:nvPr/>
-        </p:nvSpPr>
-        <p:spPr>
-          <a:xfrm>
-            <a:off x="594360" y="3529584"/>
-            <a:ext cx="11002975" cy="685800"/>
-          </a:xfrm>
-          <a:prstGeom prst="rect">
-            <a:avLst/>
-          </a:prstGeom>
-          <a:noFill/>
-        </p:spPr>
-        <p:txBody>
-          <a:bodyPr wrap="square">
-            <a:spAutoFit/>
-          </a:bodyPr>
-          <a:lstStyle/>
-          <a:p>
-            <a:pPr algn="ctr"/>
-            <a:r>
-              <a:rPr sz="4400" b="1" i="0">
+              <a:rPr sz="4800" b="1" i="0">
                 <a:solidFill>
                   <a:srgbClr val="FFFFFF"/>
                 </a:solidFill>
                 <a:latin typeface="Arial"/>
               </a:rPr>
               <a:t>Tudo a Ele eu devo</a:t>
-            </a:r>
-          </a:p>
-        </p:txBody>
-      </p:sp>
-      <p:sp>
-        <p:nvSpPr>
-          <p:cNvPr id="5" name="TextBox 4"/>
-          <p:cNvSpPr txBox="1"/>
-          <p:nvPr/>
-        </p:nvSpPr>
-        <p:spPr>
-          <a:xfrm>
-            <a:off x="594360" y="4251960"/>
-            <a:ext cx="11002975" cy="347472"/>
-          </a:xfrm>
-          <a:prstGeom prst="rect">
-            <a:avLst/>
-          </a:prstGeom>
-          <a:noFill/>
-        </p:spPr>
-        <p:txBody>
-          <a:bodyPr wrap="square">
-            <a:spAutoFit/>
-          </a:bodyPr>
-          <a:lstStyle/>
-          <a:p>
-            <a:pPr algn="ctr"/>
-            <a:r>
-              <a:rPr sz="2200" b="0" i="1">
-                <a:solidFill>
-                  <a:srgbClr val="8C8C8C"/>
-                </a:solidFill>
-                <a:latin typeface="Arial"/>
-              </a:rPr>
-              <a:t/>
             </a:r>
           </a:p>
         </p:txBody>
@@ -6024,8 +5254,8 @@
         </p:nvSpPr>
         <p:spPr>
           <a:xfrm>
-            <a:off x="594360" y="2258568"/>
-            <a:ext cx="11002975" cy="685800"/>
+            <a:off x="640080" y="2052828"/>
+            <a:ext cx="10911535" cy="731520"/>
           </a:xfrm>
           <a:prstGeom prst="rect">
             <a:avLst/>
@@ -6040,7 +5270,7 @@
           <a:p>
             <a:pPr algn="ctr"/>
             <a:r>
-              <a:rPr sz="4400" b="1" i="0">
+              <a:rPr sz="4800" b="1" i="0">
                 <a:solidFill>
                   <a:srgbClr val="FFFFFF"/>
                 </a:solidFill>
@@ -6059,8 +5289,8 @@
         </p:nvSpPr>
         <p:spPr>
           <a:xfrm>
-            <a:off x="594360" y="2980944"/>
-            <a:ext cx="11002975" cy="347472"/>
+            <a:off x="640080" y="2985516"/>
+            <a:ext cx="10911535" cy="731520"/>
           </a:xfrm>
           <a:prstGeom prst="rect">
             <a:avLst/>
@@ -6075,83 +5305,13 @@
           <a:p>
             <a:pPr algn="ctr"/>
             <a:r>
-              <a:rPr sz="2200" b="0" i="1">
-                <a:solidFill>
-                  <a:srgbClr val="8C8C8C"/>
-                </a:solidFill>
-                <a:latin typeface="Arial"/>
-              </a:rPr>
-              <a:t/>
-            </a:r>
-          </a:p>
-        </p:txBody>
-      </p:sp>
-      <p:sp>
-        <p:nvSpPr>
-          <p:cNvPr id="4" name="TextBox 3"/>
-          <p:cNvSpPr txBox="1"/>
-          <p:nvPr/>
-        </p:nvSpPr>
-        <p:spPr>
-          <a:xfrm>
-            <a:off x="594360" y="3529584"/>
-            <a:ext cx="11002975" cy="685800"/>
-          </a:xfrm>
-          <a:prstGeom prst="rect">
-            <a:avLst/>
-          </a:prstGeom>
-          <a:noFill/>
-        </p:spPr>
-        <p:txBody>
-          <a:bodyPr wrap="square">
-            <a:spAutoFit/>
-          </a:bodyPr>
-          <a:lstStyle/>
-          <a:p>
-            <a:pPr algn="ctr"/>
-            <a:r>
-              <a:rPr sz="4400" b="1" i="0">
+              <a:rPr sz="4800" b="1" i="0">
                 <a:solidFill>
                   <a:srgbClr val="FFFFFF"/>
                 </a:solidFill>
                 <a:latin typeface="Arial"/>
               </a:rPr>
               <a:t>E ao leproso pode purificar</a:t>
-            </a:r>
-          </a:p>
-        </p:txBody>
-      </p:sp>
-      <p:sp>
-        <p:nvSpPr>
-          <p:cNvPr id="5" name="TextBox 4"/>
-          <p:cNvSpPr txBox="1"/>
-          <p:nvPr/>
-        </p:nvSpPr>
-        <p:spPr>
-          <a:xfrm>
-            <a:off x="594360" y="4251960"/>
-            <a:ext cx="11002975" cy="347472"/>
-          </a:xfrm>
-          <a:prstGeom prst="rect">
-            <a:avLst/>
-          </a:prstGeom>
-          <a:noFill/>
-        </p:spPr>
-        <p:txBody>
-          <a:bodyPr wrap="square">
-            <a:spAutoFit/>
-          </a:bodyPr>
-          <a:lstStyle/>
-          <a:p>
-            <a:pPr algn="ctr"/>
-            <a:r>
-              <a:rPr sz="2200" b="0" i="1">
-                <a:solidFill>
-                  <a:srgbClr val="8C8C8C"/>
-                </a:solidFill>
-                <a:latin typeface="Arial"/>
-              </a:rPr>
-              <a:t/>
             </a:r>
           </a:p>
         </p:txBody>
@@ -6190,8 +5350,8 @@
         </p:nvSpPr>
         <p:spPr>
           <a:xfrm>
-            <a:off x="594360" y="2258568"/>
-            <a:ext cx="11002975" cy="685800"/>
+            <a:off x="640080" y="2052828"/>
+            <a:ext cx="10911535" cy="731520"/>
           </a:xfrm>
           <a:prstGeom prst="rect">
             <a:avLst/>
@@ -6206,7 +5366,7 @@
           <a:p>
             <a:pPr algn="ctr"/>
             <a:r>
-              <a:rPr sz="4400" b="1" i="0">
+              <a:rPr sz="4800" b="1" i="0">
                 <a:solidFill>
                   <a:srgbClr val="FFFFFF"/>
                 </a:solidFill>
@@ -6225,8 +5385,8 @@
         </p:nvSpPr>
         <p:spPr>
           <a:xfrm>
-            <a:off x="594360" y="2980944"/>
-            <a:ext cx="11002975" cy="347472"/>
+            <a:off x="640080" y="2985516"/>
+            <a:ext cx="10911535" cy="731520"/>
           </a:xfrm>
           <a:prstGeom prst="rect">
             <a:avLst/>
@@ -6241,83 +5401,13 @@
           <a:p>
             <a:pPr algn="ctr"/>
             <a:r>
-              <a:rPr sz="2200" b="0" i="1">
-                <a:solidFill>
-                  <a:srgbClr val="8C8C8C"/>
-                </a:solidFill>
-                <a:latin typeface="Arial"/>
-              </a:rPr>
-              <a:t/>
-            </a:r>
-          </a:p>
-        </p:txBody>
-      </p:sp>
-      <p:sp>
-        <p:nvSpPr>
-          <p:cNvPr id="4" name="TextBox 3"/>
-          <p:cNvSpPr txBox="1"/>
-          <p:nvPr/>
-        </p:nvSpPr>
-        <p:spPr>
-          <a:xfrm>
-            <a:off x="594360" y="3529584"/>
-            <a:ext cx="11002975" cy="685800"/>
-          </a:xfrm>
-          <a:prstGeom prst="rect">
-            <a:avLst/>
-          </a:prstGeom>
-          <a:noFill/>
-        </p:spPr>
-        <p:txBody>
-          <a:bodyPr wrap="square">
-            <a:spAutoFit/>
-          </a:bodyPr>
-          <a:lstStyle/>
-          <a:p>
-            <a:pPr algn="ctr"/>
-            <a:r>
-              <a:rPr sz="4400" b="1" i="0">
+              <a:rPr sz="4800" b="1" i="0">
                 <a:solidFill>
                   <a:srgbClr val="FFFFFF"/>
                 </a:solidFill>
                 <a:latin typeface="Arial"/>
               </a:rPr>
               <a:t>Tudo a Ele eu devo</a:t>
-            </a:r>
-          </a:p>
-        </p:txBody>
-      </p:sp>
-      <p:sp>
-        <p:nvSpPr>
-          <p:cNvPr id="5" name="TextBox 4"/>
-          <p:cNvSpPr txBox="1"/>
-          <p:nvPr/>
-        </p:nvSpPr>
-        <p:spPr>
-          <a:xfrm>
-            <a:off x="594360" y="4251960"/>
-            <a:ext cx="11002975" cy="347472"/>
-          </a:xfrm>
-          <a:prstGeom prst="rect">
-            <a:avLst/>
-          </a:prstGeom>
-          <a:noFill/>
-        </p:spPr>
-        <p:txBody>
-          <a:bodyPr wrap="square">
-            <a:spAutoFit/>
-          </a:bodyPr>
-          <a:lstStyle/>
-          <a:p>
-            <a:pPr algn="ctr"/>
-            <a:r>
-              <a:rPr sz="2200" b="0" i="1">
-                <a:solidFill>
-                  <a:srgbClr val="8C8C8C"/>
-                </a:solidFill>
-                <a:latin typeface="Arial"/>
-              </a:rPr>
-              <a:t/>
             </a:r>
           </a:p>
         </p:txBody>
@@ -6356,8 +5446,8 @@
         </p:nvSpPr>
         <p:spPr>
           <a:xfrm>
-            <a:off x="594360" y="2258568"/>
-            <a:ext cx="11002975" cy="685800"/>
+            <a:off x="640080" y="2052828"/>
+            <a:ext cx="10911535" cy="731520"/>
           </a:xfrm>
           <a:prstGeom prst="rect">
             <a:avLst/>
@@ -6372,7 +5462,7 @@
           <a:p>
             <a:pPr algn="ctr"/>
             <a:r>
-              <a:rPr sz="4400" b="1" i="0">
+              <a:rPr sz="4800" b="1" i="0">
                 <a:solidFill>
                   <a:srgbClr val="FFFFFF"/>
                 </a:solidFill>
@@ -6391,8 +5481,8 @@
         </p:nvSpPr>
         <p:spPr>
           <a:xfrm>
-            <a:off x="594360" y="2980944"/>
-            <a:ext cx="11002975" cy="347472"/>
+            <a:off x="640080" y="2985516"/>
+            <a:ext cx="10911535" cy="731520"/>
           </a:xfrm>
           <a:prstGeom prst="rect">
             <a:avLst/>
@@ -6407,83 +5497,13 @@
           <a:p>
             <a:pPr algn="ctr"/>
             <a:r>
-              <a:rPr sz="2200" b="0" i="1">
-                <a:solidFill>
-                  <a:srgbClr val="8C8C8C"/>
-                </a:solidFill>
-                <a:latin typeface="Arial"/>
-              </a:rPr>
-              <a:t/>
-            </a:r>
-          </a:p>
-        </p:txBody>
-      </p:sp>
-      <p:sp>
-        <p:nvSpPr>
-          <p:cNvPr id="4" name="TextBox 3"/>
-          <p:cNvSpPr txBox="1"/>
-          <p:nvPr/>
-        </p:nvSpPr>
-        <p:spPr>
-          <a:xfrm>
-            <a:off x="594360" y="3529584"/>
-            <a:ext cx="11002975" cy="685800"/>
-          </a:xfrm>
-          <a:prstGeom prst="rect">
-            <a:avLst/>
-          </a:prstGeom>
-          <a:noFill/>
-        </p:spPr>
-        <p:txBody>
-          <a:bodyPr wrap="square">
-            <a:spAutoFit/>
-          </a:bodyPr>
-          <a:lstStyle/>
-          <a:p>
-            <a:pPr algn="ctr"/>
-            <a:r>
-              <a:rPr sz="4400" b="1" i="0">
+              <a:rPr sz="4800" b="1" i="0">
                 <a:solidFill>
                   <a:srgbClr val="FFFFFF"/>
                 </a:solidFill>
                 <a:latin typeface="Arial"/>
               </a:rPr>
               <a:t>Ele me lavou branco como a neve</a:t>
-            </a:r>
-          </a:p>
-        </p:txBody>
-      </p:sp>
-      <p:sp>
-        <p:nvSpPr>
-          <p:cNvPr id="5" name="TextBox 4"/>
-          <p:cNvSpPr txBox="1"/>
-          <p:nvPr/>
-        </p:nvSpPr>
-        <p:spPr>
-          <a:xfrm>
-            <a:off x="594360" y="4251960"/>
-            <a:ext cx="11002975" cy="347472"/>
-          </a:xfrm>
-          <a:prstGeom prst="rect">
-            <a:avLst/>
-          </a:prstGeom>
-          <a:noFill/>
-        </p:spPr>
-        <p:txBody>
-          <a:bodyPr wrap="square">
-            <a:spAutoFit/>
-          </a:bodyPr>
-          <a:lstStyle/>
-          <a:p>
-            <a:pPr algn="ctr"/>
-            <a:r>
-              <a:rPr sz="2200" b="0" i="1">
-                <a:solidFill>
-                  <a:srgbClr val="8C8C8C"/>
-                </a:solidFill>
-                <a:latin typeface="Arial"/>
-              </a:rPr>
-              <a:t/>
             </a:r>
           </a:p>
         </p:txBody>
@@ -6522,8 +5542,8 @@
         </p:nvSpPr>
         <p:spPr>
           <a:xfrm>
-            <a:off x="594360" y="1837944"/>
-            <a:ext cx="11002975" cy="685800"/>
+            <a:off x="640080" y="1650492"/>
+            <a:ext cx="10911535" cy="731520"/>
           </a:xfrm>
           <a:prstGeom prst="rect">
             <a:avLst/>
@@ -6538,7 +5558,7 @@
           <a:p>
             <a:pPr algn="ctr"/>
             <a:r>
-              <a:rPr sz="4400" b="1" i="0">
+              <a:rPr sz="4800" b="1" i="0">
                 <a:solidFill>
                   <a:srgbClr val="FFFFFF"/>
                 </a:solidFill>
@@ -6557,8 +5577,8 @@
         </p:nvSpPr>
         <p:spPr>
           <a:xfrm>
-            <a:off x="594360" y="2560320"/>
-            <a:ext cx="11002975" cy="384048"/>
+            <a:off x="640080" y="2418588"/>
+            <a:ext cx="10911535" cy="365760"/>
           </a:xfrm>
           <a:prstGeom prst="rect">
             <a:avLst/>
@@ -6575,7 +5595,7 @@
             <a:r>
               <a:rPr sz="2400" b="0" i="1">
                 <a:solidFill>
-                  <a:srgbClr val="B4B4B4"/>
+                  <a:srgbClr val="AAAAAA"/>
                 </a:solidFill>
                 <a:latin typeface="Arial"/>
               </a:rPr>
@@ -6592,8 +5612,8 @@
         </p:nvSpPr>
         <p:spPr>
           <a:xfrm>
-            <a:off x="594360" y="2980944"/>
-            <a:ext cx="11002975" cy="347472"/>
+            <a:off x="640080" y="2985516"/>
+            <a:ext cx="10911535" cy="731520"/>
           </a:xfrm>
           <a:prstGeom prst="rect">
             <a:avLst/>
@@ -6608,13 +5628,13 @@
           <a:p>
             <a:pPr algn="ctr"/>
             <a:r>
-              <a:rPr sz="2000" b="0" i="1">
-                <a:solidFill>
-                  <a:srgbClr val="8C8C8C"/>
+              <a:rPr sz="4800" b="1" i="0">
+                <a:solidFill>
+                  <a:srgbClr val="FFFFFF"/>
                 </a:solidFill>
                 <a:latin typeface="Arial"/>
               </a:rPr>
-              <a:t/>
+              <a:t>主の十字架の   愛を讃えて</a:t>
             </a:r>
           </a:p>
         </p:txBody>
@@ -6627,8 +5647,8 @@
         </p:nvSpPr>
         <p:spPr>
           <a:xfrm>
-            <a:off x="594360" y="3529584"/>
-            <a:ext cx="11002975" cy="685800"/>
+            <a:off x="640080" y="3753612"/>
+            <a:ext cx="10911535" cy="365760"/>
           </a:xfrm>
           <a:prstGeom prst="rect">
             <a:avLst/>
@@ -6643,13 +5663,13 @@
           <a:p>
             <a:pPr algn="ctr"/>
             <a:r>
-              <a:rPr sz="4400" b="1" i="0">
-                <a:solidFill>
-                  <a:srgbClr val="FFFFFF"/>
+              <a:rPr sz="2400" b="0" i="1">
+                <a:solidFill>
+                  <a:srgbClr val="AAAAAA"/>
                 </a:solidFill>
                 <a:latin typeface="Arial"/>
               </a:rPr>
-              <a:t>主の十字架の   愛を讃えて</a:t>
+              <a:t>shu no jyuujika no ai wo tataete</a:t>
             </a:r>
           </a:p>
         </p:txBody>
@@ -6662,8 +5682,8 @@
         </p:nvSpPr>
         <p:spPr>
           <a:xfrm>
-            <a:off x="594360" y="4251960"/>
-            <a:ext cx="11002975" cy="384048"/>
+            <a:off x="640080" y="4530852"/>
+            <a:ext cx="10911535" cy="310896"/>
           </a:xfrm>
           <a:prstGeom prst="rect">
             <a:avLst/>
@@ -6678,13 +5698,13 @@
           <a:p>
             <a:pPr algn="ctr"/>
             <a:r>
-              <a:rPr sz="2400" b="0" i="1">
-                <a:solidFill>
-                  <a:srgbClr val="B4B4B4"/>
+              <a:rPr sz="2000" b="0" i="1">
+                <a:solidFill>
+                  <a:srgbClr val="828282"/>
                 </a:solidFill>
                 <a:latin typeface="Arial"/>
               </a:rPr>
-              <a:t>shu no jyuujika no ai wo tataete</a:t>
+              <a:t>Ouço o Salvador dizer:</a:t>
             </a:r>
           </a:p>
         </p:txBody>
@@ -6697,8 +5717,8 @@
         </p:nvSpPr>
         <p:spPr>
           <a:xfrm>
-            <a:off x="594360" y="4672584"/>
-            <a:ext cx="11002975" cy="347472"/>
+            <a:off x="640080" y="4896612"/>
+            <a:ext cx="10911535" cy="310896"/>
           </a:xfrm>
           <a:prstGeom prst="rect">
             <a:avLst/>
@@ -6715,11 +5735,11 @@
             <a:r>
               <a:rPr sz="2000" b="0" i="1">
                 <a:solidFill>
-                  <a:srgbClr val="8C8C8C"/>
+                  <a:srgbClr val="828282"/>
                 </a:solidFill>
                 <a:latin typeface="Arial"/>
               </a:rPr>
-              <a:t/>
+              <a:t>"Tua força é tão pequena;</a:t>
             </a:r>
           </a:p>
         </p:txBody>

--- a/output_pptx/Jesus_Paid_It_All.pptx
+++ b/output_pptx/Jesus_Paid_It_All.pptx
@@ -3657,6 +3657,76 @@
           </a:p>
         </p:txBody>
       </p:sp>
+      <p:sp>
+        <p:nvSpPr>
+          <p:cNvPr id="4" name="TextBox 3"/>
+          <p:cNvSpPr txBox="1"/>
+          <p:nvPr/>
+        </p:nvSpPr>
+        <p:spPr>
+          <a:xfrm>
+            <a:off x="640080" y="4128516"/>
+            <a:ext cx="10911535" cy="310896"/>
+          </a:xfrm>
+          <a:prstGeom prst="rect">
+            <a:avLst/>
+          </a:prstGeom>
+          <a:noFill/>
+        </p:spPr>
+        <p:txBody>
+          <a:bodyPr wrap="square">
+            <a:spAutoFit/>
+          </a:bodyPr>
+          <a:lstStyle/>
+          <a:p>
+            <a:pPr algn="ctr"/>
+            <a:r>
+              <a:rPr sz="2000" b="0" i="0">
+                <a:solidFill>
+                  <a:srgbClr val="828282"/>
+                </a:solidFill>
+                <a:latin typeface="Arial"/>
+              </a:rPr>
+              <a:t>主よ、本当に今、私は見出します</a:t>
+            </a:r>
+          </a:p>
+        </p:txBody>
+      </p:sp>
+      <p:sp>
+        <p:nvSpPr>
+          <p:cNvPr id="5" name="TextBox 4"/>
+          <p:cNvSpPr txBox="1"/>
+          <p:nvPr/>
+        </p:nvSpPr>
+        <p:spPr>
+          <a:xfrm>
+            <a:off x="640080" y="4494276"/>
+            <a:ext cx="10911535" cy="310896"/>
+          </a:xfrm>
+          <a:prstGeom prst="rect">
+            <a:avLst/>
+          </a:prstGeom>
+          <a:noFill/>
+        </p:spPr>
+        <p:txBody>
+          <a:bodyPr wrap="square">
+            <a:spAutoFit/>
+          </a:bodyPr>
+          <a:lstStyle/>
+          <a:p>
+            <a:pPr algn="ctr"/>
+            <a:r>
+              <a:rPr sz="2000" b="0" i="0">
+                <a:solidFill>
+                  <a:srgbClr val="828282"/>
+                </a:solidFill>
+                <a:latin typeface="Arial"/>
+              </a:rPr>
+              <a:t>あなたの力のみを</a:t>
+            </a:r>
+          </a:p>
+        </p:txBody>
+      </p:sp>
     </p:spTree>
   </p:cSld>
   <p:clrMapOvr>
@@ -3753,6 +3823,76 @@
           </a:p>
         </p:txBody>
       </p:sp>
+      <p:sp>
+        <p:nvSpPr>
+          <p:cNvPr id="4" name="TextBox 3"/>
+          <p:cNvSpPr txBox="1"/>
+          <p:nvPr/>
+        </p:nvSpPr>
+        <p:spPr>
+          <a:xfrm>
+            <a:off x="640080" y="4128516"/>
+            <a:ext cx="10911535" cy="310896"/>
+          </a:xfrm>
+          <a:prstGeom prst="rect">
+            <a:avLst/>
+          </a:prstGeom>
+          <a:noFill/>
+        </p:spPr>
+        <p:txBody>
+          <a:bodyPr wrap="square">
+            <a:spAutoFit/>
+          </a:bodyPr>
+          <a:lstStyle/>
+          <a:p>
+            <a:pPr algn="ctr"/>
+            <a:r>
+              <a:rPr sz="2000" b="0" i="0">
+                <a:solidFill>
+                  <a:srgbClr val="828282"/>
+                </a:solidFill>
+                <a:latin typeface="Arial"/>
+              </a:rPr>
+              <a:t>弱き子よ、目を覚まし祈れ、</a:t>
+            </a:r>
+          </a:p>
+        </p:txBody>
+      </p:sp>
+      <p:sp>
+        <p:nvSpPr>
+          <p:cNvPr id="5" name="TextBox 4"/>
+          <p:cNvSpPr txBox="1"/>
+          <p:nvPr/>
+        </p:nvSpPr>
+        <p:spPr>
+          <a:xfrm>
+            <a:off x="640080" y="4494276"/>
+            <a:ext cx="10911535" cy="310896"/>
+          </a:xfrm>
+          <a:prstGeom prst="rect">
+            <a:avLst/>
+          </a:prstGeom>
+          <a:noFill/>
+        </p:spPr>
+        <p:txBody>
+          <a:bodyPr wrap="square">
+            <a:spAutoFit/>
+          </a:bodyPr>
+          <a:lstStyle/>
+          <a:p>
+            <a:pPr algn="ctr"/>
+            <a:r>
+              <a:rPr sz="2000" b="0" i="0">
+                <a:solidFill>
+                  <a:srgbClr val="828282"/>
+                </a:solidFill>
+                <a:latin typeface="Arial"/>
+              </a:rPr>
+              <a:t>わたしの中にあなたのすべてを見出せ」</a:t>
+            </a:r>
+          </a:p>
+        </p:txBody>
+      </p:sp>
     </p:spTree>
   </p:cSld>
   <p:clrMapOvr>
@@ -3849,6 +3989,76 @@
           </a:p>
         </p:txBody>
       </p:sp>
+      <p:sp>
+        <p:nvSpPr>
+          <p:cNvPr id="4" name="TextBox 3"/>
+          <p:cNvSpPr txBox="1"/>
+          <p:nvPr/>
+        </p:nvSpPr>
+        <p:spPr>
+          <a:xfrm>
+            <a:off x="640080" y="4128516"/>
+            <a:ext cx="10911535" cy="310896"/>
+          </a:xfrm>
+          <a:prstGeom prst="rect">
+            <a:avLst/>
+          </a:prstGeom>
+          <a:noFill/>
+        </p:spPr>
+        <p:txBody>
+          <a:bodyPr wrap="square">
+            <a:spAutoFit/>
+          </a:bodyPr>
+          <a:lstStyle/>
+          <a:p>
+            <a:pPr algn="ctr"/>
+            <a:r>
+              <a:rPr sz="2000" b="0" i="0">
+                <a:solidFill>
+                  <a:srgbClr val="828282"/>
+                </a:solidFill>
+                <a:latin typeface="Arial"/>
+              </a:rPr>
+              <a:t>イエスがすべてを支払われた</a:t>
+            </a:r>
+          </a:p>
+        </p:txBody>
+      </p:sp>
+      <p:sp>
+        <p:nvSpPr>
+          <p:cNvPr id="5" name="TextBox 4"/>
+          <p:cNvSpPr txBox="1"/>
+          <p:nvPr/>
+        </p:nvSpPr>
+        <p:spPr>
+          <a:xfrm>
+            <a:off x="640080" y="4494276"/>
+            <a:ext cx="10911535" cy="310896"/>
+          </a:xfrm>
+          <a:prstGeom prst="rect">
+            <a:avLst/>
+          </a:prstGeom>
+          <a:noFill/>
+        </p:spPr>
+        <p:txBody>
+          <a:bodyPr wrap="square">
+            <a:spAutoFit/>
+          </a:bodyPr>
+          <a:lstStyle/>
+          <a:p>
+            <a:pPr algn="ctr"/>
+            <a:r>
+              <a:rPr sz="2000" b="0" i="0">
+                <a:solidFill>
+                  <a:srgbClr val="828282"/>
+                </a:solidFill>
+                <a:latin typeface="Arial"/>
+              </a:rPr>
+              <a:t>すべてを彼に負っている</a:t>
+            </a:r>
+          </a:p>
+        </p:txBody>
+      </p:sp>
     </p:spTree>
   </p:cSld>
   <p:clrMapOvr>
@@ -3945,6 +4155,76 @@
           </a:p>
         </p:txBody>
       </p:sp>
+      <p:sp>
+        <p:nvSpPr>
+          <p:cNvPr id="4" name="TextBox 3"/>
+          <p:cNvSpPr txBox="1"/>
+          <p:nvPr/>
+        </p:nvSpPr>
+        <p:spPr>
+          <a:xfrm>
+            <a:off x="640080" y="4128516"/>
+            <a:ext cx="10911535" cy="310896"/>
+          </a:xfrm>
+          <a:prstGeom prst="rect">
+            <a:avLst/>
+          </a:prstGeom>
+          <a:noFill/>
+        </p:spPr>
+        <p:txBody>
+          <a:bodyPr wrap="square">
+            <a:spAutoFit/>
+          </a:bodyPr>
+          <a:lstStyle/>
+          <a:p>
+            <a:pPr algn="ctr"/>
+            <a:r>
+              <a:rPr sz="2000" b="0" i="0">
+                <a:solidFill>
+                  <a:srgbClr val="828282"/>
+                </a:solidFill>
+                <a:latin typeface="Arial"/>
+              </a:rPr>
+              <a:t>石のような心を変える</a:t>
+            </a:r>
+          </a:p>
+        </p:txBody>
+      </p:sp>
+      <p:sp>
+        <p:nvSpPr>
+          <p:cNvPr id="5" name="TextBox 4"/>
+          <p:cNvSpPr txBox="1"/>
+          <p:nvPr/>
+        </p:nvSpPr>
+        <p:spPr>
+          <a:xfrm>
+            <a:off x="640080" y="4494276"/>
+            <a:ext cx="10911535" cy="310896"/>
+          </a:xfrm>
+          <a:prstGeom prst="rect">
+            <a:avLst/>
+          </a:prstGeom>
+          <a:noFill/>
+        </p:spPr>
+        <p:txBody>
+          <a:bodyPr wrap="square">
+            <a:spAutoFit/>
+          </a:bodyPr>
+          <a:lstStyle/>
+          <a:p>
+            <a:pPr algn="ctr"/>
+            <a:r>
+              <a:rPr sz="2000" b="0" i="0">
+                <a:solidFill>
+                  <a:srgbClr val="828282"/>
+                </a:solidFill>
+                <a:latin typeface="Arial"/>
+              </a:rPr>
+              <a:t>ハンセン病人さえも清めることができる</a:t>
+            </a:r>
+          </a:p>
+        </p:txBody>
+      </p:sp>
     </p:spTree>
   </p:cSld>
   <p:clrMapOvr>
@@ -4041,6 +4321,76 @@
           </a:p>
         </p:txBody>
       </p:sp>
+      <p:sp>
+        <p:nvSpPr>
+          <p:cNvPr id="4" name="TextBox 3"/>
+          <p:cNvSpPr txBox="1"/>
+          <p:nvPr/>
+        </p:nvSpPr>
+        <p:spPr>
+          <a:xfrm>
+            <a:off x="640080" y="4128516"/>
+            <a:ext cx="10911535" cy="310896"/>
+          </a:xfrm>
+          <a:prstGeom prst="rect">
+            <a:avLst/>
+          </a:prstGeom>
+          <a:noFill/>
+        </p:spPr>
+        <p:txBody>
+          <a:bodyPr wrap="square">
+            <a:spAutoFit/>
+          </a:bodyPr>
+          <a:lstStyle/>
+          <a:p>
+            <a:pPr algn="ctr"/>
+            <a:r>
+              <a:rPr sz="2000" b="0" i="0">
+                <a:solidFill>
+                  <a:srgbClr val="828282"/>
+                </a:solidFill>
+                <a:latin typeface="Arial"/>
+              </a:rPr>
+              <a:t>イエスがすべてを支払われた</a:t>
+            </a:r>
+          </a:p>
+        </p:txBody>
+      </p:sp>
+      <p:sp>
+        <p:nvSpPr>
+          <p:cNvPr id="5" name="TextBox 4"/>
+          <p:cNvSpPr txBox="1"/>
+          <p:nvPr/>
+        </p:nvSpPr>
+        <p:spPr>
+          <a:xfrm>
+            <a:off x="640080" y="4494276"/>
+            <a:ext cx="10911535" cy="310896"/>
+          </a:xfrm>
+          <a:prstGeom prst="rect">
+            <a:avLst/>
+          </a:prstGeom>
+          <a:noFill/>
+        </p:spPr>
+        <p:txBody>
+          <a:bodyPr wrap="square">
+            <a:spAutoFit/>
+          </a:bodyPr>
+          <a:lstStyle/>
+          <a:p>
+            <a:pPr algn="ctr"/>
+            <a:r>
+              <a:rPr sz="2000" b="0" i="0">
+                <a:solidFill>
+                  <a:srgbClr val="828282"/>
+                </a:solidFill>
+                <a:latin typeface="Arial"/>
+              </a:rPr>
+              <a:t>すべてを彼に負っている</a:t>
+            </a:r>
+          </a:p>
+        </p:txBody>
+      </p:sp>
     </p:spTree>
   </p:cSld>
   <p:clrMapOvr>
@@ -4137,6 +4487,76 @@
           </a:p>
         </p:txBody>
       </p:sp>
+      <p:sp>
+        <p:nvSpPr>
+          <p:cNvPr id="4" name="TextBox 3"/>
+          <p:cNvSpPr txBox="1"/>
+          <p:nvPr/>
+        </p:nvSpPr>
+        <p:spPr>
+          <a:xfrm>
+            <a:off x="640080" y="4128516"/>
+            <a:ext cx="10911535" cy="310896"/>
+          </a:xfrm>
+          <a:prstGeom prst="rect">
+            <a:avLst/>
+          </a:prstGeom>
+          <a:noFill/>
+        </p:spPr>
+        <p:txBody>
+          <a:bodyPr wrap="square">
+            <a:spAutoFit/>
+          </a:bodyPr>
+          <a:lstStyle/>
+          <a:p>
+            <a:pPr algn="ctr"/>
+            <a:r>
+              <a:rPr sz="2000" b="0" i="0">
+                <a:solidFill>
+                  <a:srgbClr val="828282"/>
+                </a:solidFill>
+                <a:latin typeface="Arial"/>
+              </a:rPr>
+              <a:t>罪は深紅の汚れを残した</a:t>
+            </a:r>
+          </a:p>
+        </p:txBody>
+      </p:sp>
+      <p:sp>
+        <p:nvSpPr>
+          <p:cNvPr id="5" name="TextBox 4"/>
+          <p:cNvSpPr txBox="1"/>
+          <p:nvPr/>
+        </p:nvSpPr>
+        <p:spPr>
+          <a:xfrm>
+            <a:off x="640080" y="4494276"/>
+            <a:ext cx="10911535" cy="310896"/>
+          </a:xfrm>
+          <a:prstGeom prst="rect">
+            <a:avLst/>
+          </a:prstGeom>
+          <a:noFill/>
+        </p:spPr>
+        <p:txBody>
+          <a:bodyPr wrap="square">
+            <a:spAutoFit/>
+          </a:bodyPr>
+          <a:lstStyle/>
+          <a:p>
+            <a:pPr algn="ctr"/>
+            <a:r>
+              <a:rPr sz="2000" b="0" i="0">
+                <a:solidFill>
+                  <a:srgbClr val="828282"/>
+                </a:solidFill>
+                <a:latin typeface="Arial"/>
+              </a:rPr>
+              <a:t>彼は私を雪のように白く洗った</a:t>
+            </a:r>
+          </a:p>
+        </p:txBody>
+      </p:sp>
     </p:spTree>
   </p:cSld>
   <p:clrMapOvr>
@@ -4233,6 +4653,76 @@
           </a:p>
         </p:txBody>
       </p:sp>
+      <p:sp>
+        <p:nvSpPr>
+          <p:cNvPr id="4" name="TextBox 3"/>
+          <p:cNvSpPr txBox="1"/>
+          <p:nvPr/>
+        </p:nvSpPr>
+        <p:spPr>
+          <a:xfrm>
+            <a:off x="640080" y="4128516"/>
+            <a:ext cx="10911535" cy="310896"/>
+          </a:xfrm>
+          <a:prstGeom prst="rect">
+            <a:avLst/>
+          </a:prstGeom>
+          <a:noFill/>
+        </p:spPr>
+        <p:txBody>
+          <a:bodyPr wrap="square">
+            <a:spAutoFit/>
+          </a:bodyPr>
+          <a:lstStyle/>
+          <a:p>
+            <a:pPr algn="ctr"/>
+            <a:r>
+              <a:rPr sz="2000" b="0" i="0">
+                <a:solidFill>
+                  <a:srgbClr val="828282"/>
+                </a:solidFill>
+                <a:latin typeface="Arial"/>
+              </a:rPr>
+              <a:t>キリストにあって私は完全である</a:t>
+            </a:r>
+          </a:p>
+        </p:txBody>
+      </p:sp>
+      <p:sp>
+        <p:nvSpPr>
+          <p:cNvPr id="5" name="TextBox 4"/>
+          <p:cNvSpPr txBox="1"/>
+          <p:nvPr/>
+        </p:nvSpPr>
+        <p:spPr>
+          <a:xfrm>
+            <a:off x="640080" y="4494276"/>
+            <a:ext cx="10911535" cy="310896"/>
+          </a:xfrm>
+          <a:prstGeom prst="rect">
+            <a:avLst/>
+          </a:prstGeom>
+          <a:noFill/>
+        </p:spPr>
+        <p:txBody>
+          <a:bodyPr wrap="square">
+            <a:spAutoFit/>
+          </a:bodyPr>
+          <a:lstStyle/>
+          <a:p>
+            <a:pPr algn="ctr"/>
+            <a:r>
+              <a:rPr sz="2000" b="0" i="0">
+                <a:solidFill>
+                  <a:srgbClr val="828282"/>
+                </a:solidFill>
+                <a:latin typeface="Arial"/>
+              </a:rPr>
+              <a:t>「イエスは私の魂を救うために死なれた」</a:t>
+            </a:r>
+          </a:p>
+        </p:txBody>
+      </p:sp>
     </p:spTree>
   </p:cSld>
   <p:clrMapOvr>
@@ -4329,6 +4819,76 @@
           </a:p>
         </p:txBody>
       </p:sp>
+      <p:sp>
+        <p:nvSpPr>
+          <p:cNvPr id="4" name="TextBox 3"/>
+          <p:cNvSpPr txBox="1"/>
+          <p:nvPr/>
+        </p:nvSpPr>
+        <p:spPr>
+          <a:xfrm>
+            <a:off x="640080" y="4128516"/>
+            <a:ext cx="10911535" cy="310896"/>
+          </a:xfrm>
+          <a:prstGeom prst="rect">
+            <a:avLst/>
+          </a:prstGeom>
+          <a:noFill/>
+        </p:spPr>
+        <p:txBody>
+          <a:bodyPr wrap="square">
+            <a:spAutoFit/>
+          </a:bodyPr>
+          <a:lstStyle/>
+          <a:p>
+            <a:pPr algn="ctr"/>
+            <a:r>
+              <a:rPr sz="2000" b="0" i="0">
+                <a:solidFill>
+                  <a:srgbClr val="828282"/>
+                </a:solidFill>
+                <a:latin typeface="Arial"/>
+              </a:rPr>
+              <a:t>私の唇はなお繰り返すでしょう</a:t>
+            </a:r>
+          </a:p>
+        </p:txBody>
+      </p:sp>
+      <p:sp>
+        <p:nvSpPr>
+          <p:cNvPr id="5" name="TextBox 4"/>
+          <p:cNvSpPr txBox="1"/>
+          <p:nvPr/>
+        </p:nvSpPr>
+        <p:spPr>
+          <a:xfrm>
+            <a:off x="640080" y="4494276"/>
+            <a:ext cx="10911535" cy="310896"/>
+          </a:xfrm>
+          <a:prstGeom prst="rect">
+            <a:avLst/>
+          </a:prstGeom>
+          <a:noFill/>
+        </p:spPr>
+        <p:txBody>
+          <a:bodyPr wrap="square">
+            <a:spAutoFit/>
+          </a:bodyPr>
+          <a:lstStyle/>
+          <a:p>
+            <a:pPr algn="ctr"/>
+            <a:r>
+              <a:rPr sz="2000" b="0" i="0">
+                <a:solidFill>
+                  <a:srgbClr val="828282"/>
+                </a:solidFill>
+                <a:latin typeface="Arial"/>
+              </a:rPr>
+              <a:t>イエスがすべてを支払われた</a:t>
+            </a:r>
+          </a:p>
+        </p:txBody>
+      </p:sp>
     </p:spTree>
   </p:cSld>
   <p:clrMapOvr>
@@ -5028,6 +5588,76 @@
           </a:p>
         </p:txBody>
       </p:sp>
+      <p:sp>
+        <p:nvSpPr>
+          <p:cNvPr id="4" name="TextBox 3"/>
+          <p:cNvSpPr txBox="1"/>
+          <p:nvPr/>
+        </p:nvSpPr>
+        <p:spPr>
+          <a:xfrm>
+            <a:off x="640080" y="4128516"/>
+            <a:ext cx="10911535" cy="310896"/>
+          </a:xfrm>
+          <a:prstGeom prst="rect">
+            <a:avLst/>
+          </a:prstGeom>
+          <a:noFill/>
+        </p:spPr>
+        <p:txBody>
+          <a:bodyPr wrap="square">
+            <a:spAutoFit/>
+          </a:bodyPr>
+          <a:lstStyle/>
+          <a:p>
+            <a:pPr algn="ctr"/>
+            <a:r>
+              <a:rPr sz="2000" b="0" i="0">
+                <a:solidFill>
+                  <a:srgbClr val="828282"/>
+                </a:solidFill>
+                <a:latin typeface="Arial"/>
+              </a:rPr>
+              <a:t>救い主が言うのを聞きます：</a:t>
+            </a:r>
+          </a:p>
+        </p:txBody>
+      </p:sp>
+      <p:sp>
+        <p:nvSpPr>
+          <p:cNvPr id="5" name="TextBox 4"/>
+          <p:cNvSpPr txBox="1"/>
+          <p:nvPr/>
+        </p:nvSpPr>
+        <p:spPr>
+          <a:xfrm>
+            <a:off x="640080" y="4494276"/>
+            <a:ext cx="10911535" cy="310896"/>
+          </a:xfrm>
+          <a:prstGeom prst="rect">
+            <a:avLst/>
+          </a:prstGeom>
+          <a:noFill/>
+        </p:spPr>
+        <p:txBody>
+          <a:bodyPr wrap="square">
+            <a:spAutoFit/>
+          </a:bodyPr>
+          <a:lstStyle/>
+          <a:p>
+            <a:pPr algn="ctr"/>
+            <a:r>
+              <a:rPr sz="2000" b="0" i="0">
+                <a:solidFill>
+                  <a:srgbClr val="828282"/>
+                </a:solidFill>
+                <a:latin typeface="Arial"/>
+              </a:rPr>
+              <a:t>「あなたの力はとても小さい；</a:t>
+            </a:r>
+          </a:p>
+        </p:txBody>
+      </p:sp>
     </p:spTree>
   </p:cSld>
   <p:clrMapOvr>
@@ -5124,6 +5754,76 @@
           </a:p>
         </p:txBody>
       </p:sp>
+      <p:sp>
+        <p:nvSpPr>
+          <p:cNvPr id="4" name="TextBox 3"/>
+          <p:cNvSpPr txBox="1"/>
+          <p:nvPr/>
+        </p:nvSpPr>
+        <p:spPr>
+          <a:xfrm>
+            <a:off x="640080" y="4128516"/>
+            <a:ext cx="10911535" cy="310896"/>
+          </a:xfrm>
+          <a:prstGeom prst="rect">
+            <a:avLst/>
+          </a:prstGeom>
+          <a:noFill/>
+        </p:spPr>
+        <p:txBody>
+          <a:bodyPr wrap="square">
+            <a:spAutoFit/>
+          </a:bodyPr>
+          <a:lstStyle/>
+          <a:p>
+            <a:pPr algn="ctr"/>
+            <a:r>
+              <a:rPr sz="2000" b="0" i="0">
+                <a:solidFill>
+                  <a:srgbClr val="828282"/>
+                </a:solidFill>
+                <a:latin typeface="Arial"/>
+              </a:rPr>
+              <a:t>弱き子よ、目を覚まし祈れ、</a:t>
+            </a:r>
+          </a:p>
+        </p:txBody>
+      </p:sp>
+      <p:sp>
+        <p:nvSpPr>
+          <p:cNvPr id="5" name="TextBox 4"/>
+          <p:cNvSpPr txBox="1"/>
+          <p:nvPr/>
+        </p:nvSpPr>
+        <p:spPr>
+          <a:xfrm>
+            <a:off x="640080" y="4494276"/>
+            <a:ext cx="10911535" cy="310896"/>
+          </a:xfrm>
+          <a:prstGeom prst="rect">
+            <a:avLst/>
+          </a:prstGeom>
+          <a:noFill/>
+        </p:spPr>
+        <p:txBody>
+          <a:bodyPr wrap="square">
+            <a:spAutoFit/>
+          </a:bodyPr>
+          <a:lstStyle/>
+          <a:p>
+            <a:pPr algn="ctr"/>
+            <a:r>
+              <a:rPr sz="2000" b="0" i="0">
+                <a:solidFill>
+                  <a:srgbClr val="828282"/>
+                </a:solidFill>
+                <a:latin typeface="Arial"/>
+              </a:rPr>
+              <a:t>わたしの中にあなたのすべてを見出せ」</a:t>
+            </a:r>
+          </a:p>
+        </p:txBody>
+      </p:sp>
     </p:spTree>
   </p:cSld>
   <p:clrMapOvr>
@@ -5220,6 +5920,76 @@
           </a:p>
         </p:txBody>
       </p:sp>
+      <p:sp>
+        <p:nvSpPr>
+          <p:cNvPr id="4" name="TextBox 3"/>
+          <p:cNvSpPr txBox="1"/>
+          <p:nvPr/>
+        </p:nvSpPr>
+        <p:spPr>
+          <a:xfrm>
+            <a:off x="640080" y="4128516"/>
+            <a:ext cx="10911535" cy="310896"/>
+          </a:xfrm>
+          <a:prstGeom prst="rect">
+            <a:avLst/>
+          </a:prstGeom>
+          <a:noFill/>
+        </p:spPr>
+        <p:txBody>
+          <a:bodyPr wrap="square">
+            <a:spAutoFit/>
+          </a:bodyPr>
+          <a:lstStyle/>
+          <a:p>
+            <a:pPr algn="ctr"/>
+            <a:r>
+              <a:rPr sz="2000" b="0" i="0">
+                <a:solidFill>
+                  <a:srgbClr val="828282"/>
+                </a:solidFill>
+                <a:latin typeface="Arial"/>
+              </a:rPr>
+              <a:t>イエスがすべてを支払われた</a:t>
+            </a:r>
+          </a:p>
+        </p:txBody>
+      </p:sp>
+      <p:sp>
+        <p:nvSpPr>
+          <p:cNvPr id="5" name="TextBox 4"/>
+          <p:cNvSpPr txBox="1"/>
+          <p:nvPr/>
+        </p:nvSpPr>
+        <p:spPr>
+          <a:xfrm>
+            <a:off x="640080" y="4494276"/>
+            <a:ext cx="10911535" cy="310896"/>
+          </a:xfrm>
+          <a:prstGeom prst="rect">
+            <a:avLst/>
+          </a:prstGeom>
+          <a:noFill/>
+        </p:spPr>
+        <p:txBody>
+          <a:bodyPr wrap="square">
+            <a:spAutoFit/>
+          </a:bodyPr>
+          <a:lstStyle/>
+          <a:p>
+            <a:pPr algn="ctr"/>
+            <a:r>
+              <a:rPr sz="2000" b="0" i="0">
+                <a:solidFill>
+                  <a:srgbClr val="828282"/>
+                </a:solidFill>
+                <a:latin typeface="Arial"/>
+              </a:rPr>
+              <a:t>すべてを彼に負っている</a:t>
+            </a:r>
+          </a:p>
+        </p:txBody>
+      </p:sp>
     </p:spTree>
   </p:cSld>
   <p:clrMapOvr>
@@ -5316,6 +6086,76 @@
           </a:p>
         </p:txBody>
       </p:sp>
+      <p:sp>
+        <p:nvSpPr>
+          <p:cNvPr id="4" name="TextBox 3"/>
+          <p:cNvSpPr txBox="1"/>
+          <p:nvPr/>
+        </p:nvSpPr>
+        <p:spPr>
+          <a:xfrm>
+            <a:off x="640080" y="4128516"/>
+            <a:ext cx="10911535" cy="310896"/>
+          </a:xfrm>
+          <a:prstGeom prst="rect">
+            <a:avLst/>
+          </a:prstGeom>
+          <a:noFill/>
+        </p:spPr>
+        <p:txBody>
+          <a:bodyPr wrap="square">
+            <a:spAutoFit/>
+          </a:bodyPr>
+          <a:lstStyle/>
+          <a:p>
+            <a:pPr algn="ctr"/>
+            <a:r>
+              <a:rPr sz="2000" b="0" i="0">
+                <a:solidFill>
+                  <a:srgbClr val="828282"/>
+                </a:solidFill>
+                <a:latin typeface="Arial"/>
+              </a:rPr>
+              <a:t>石のような心を変える</a:t>
+            </a:r>
+          </a:p>
+        </p:txBody>
+      </p:sp>
+      <p:sp>
+        <p:nvSpPr>
+          <p:cNvPr id="5" name="TextBox 4"/>
+          <p:cNvSpPr txBox="1"/>
+          <p:nvPr/>
+        </p:nvSpPr>
+        <p:spPr>
+          <a:xfrm>
+            <a:off x="640080" y="4494276"/>
+            <a:ext cx="10911535" cy="310896"/>
+          </a:xfrm>
+          <a:prstGeom prst="rect">
+            <a:avLst/>
+          </a:prstGeom>
+          <a:noFill/>
+        </p:spPr>
+        <p:txBody>
+          <a:bodyPr wrap="square">
+            <a:spAutoFit/>
+          </a:bodyPr>
+          <a:lstStyle/>
+          <a:p>
+            <a:pPr algn="ctr"/>
+            <a:r>
+              <a:rPr sz="2000" b="0" i="0">
+                <a:solidFill>
+                  <a:srgbClr val="828282"/>
+                </a:solidFill>
+                <a:latin typeface="Arial"/>
+              </a:rPr>
+              <a:t>ハンセン病人さえも清めることができる</a:t>
+            </a:r>
+          </a:p>
+        </p:txBody>
+      </p:sp>
     </p:spTree>
   </p:cSld>
   <p:clrMapOvr>
@@ -5412,6 +6252,76 @@
           </a:p>
         </p:txBody>
       </p:sp>
+      <p:sp>
+        <p:nvSpPr>
+          <p:cNvPr id="4" name="TextBox 3"/>
+          <p:cNvSpPr txBox="1"/>
+          <p:nvPr/>
+        </p:nvSpPr>
+        <p:spPr>
+          <a:xfrm>
+            <a:off x="640080" y="4128516"/>
+            <a:ext cx="10911535" cy="310896"/>
+          </a:xfrm>
+          <a:prstGeom prst="rect">
+            <a:avLst/>
+          </a:prstGeom>
+          <a:noFill/>
+        </p:spPr>
+        <p:txBody>
+          <a:bodyPr wrap="square">
+            <a:spAutoFit/>
+          </a:bodyPr>
+          <a:lstStyle/>
+          <a:p>
+            <a:pPr algn="ctr"/>
+            <a:r>
+              <a:rPr sz="2000" b="0" i="0">
+                <a:solidFill>
+                  <a:srgbClr val="828282"/>
+                </a:solidFill>
+                <a:latin typeface="Arial"/>
+              </a:rPr>
+              <a:t>イエスがすべてを支払われた</a:t>
+            </a:r>
+          </a:p>
+        </p:txBody>
+      </p:sp>
+      <p:sp>
+        <p:nvSpPr>
+          <p:cNvPr id="5" name="TextBox 4"/>
+          <p:cNvSpPr txBox="1"/>
+          <p:nvPr/>
+        </p:nvSpPr>
+        <p:spPr>
+          <a:xfrm>
+            <a:off x="640080" y="4494276"/>
+            <a:ext cx="10911535" cy="310896"/>
+          </a:xfrm>
+          <a:prstGeom prst="rect">
+            <a:avLst/>
+          </a:prstGeom>
+          <a:noFill/>
+        </p:spPr>
+        <p:txBody>
+          <a:bodyPr wrap="square">
+            <a:spAutoFit/>
+          </a:bodyPr>
+          <a:lstStyle/>
+          <a:p>
+            <a:pPr algn="ctr"/>
+            <a:r>
+              <a:rPr sz="2000" b="0" i="0">
+                <a:solidFill>
+                  <a:srgbClr val="828282"/>
+                </a:solidFill>
+                <a:latin typeface="Arial"/>
+              </a:rPr>
+              <a:t>すべてを彼に負っている</a:t>
+            </a:r>
+          </a:p>
+        </p:txBody>
+      </p:sp>
     </p:spTree>
   </p:cSld>
   <p:clrMapOvr>
@@ -5504,6 +6414,76 @@
                 <a:latin typeface="Arial"/>
               </a:rPr>
               <a:t>Ele me lavou branco como a neve</a:t>
+            </a:r>
+          </a:p>
+        </p:txBody>
+      </p:sp>
+      <p:sp>
+        <p:nvSpPr>
+          <p:cNvPr id="4" name="TextBox 3"/>
+          <p:cNvSpPr txBox="1"/>
+          <p:nvPr/>
+        </p:nvSpPr>
+        <p:spPr>
+          <a:xfrm>
+            <a:off x="640080" y="4128516"/>
+            <a:ext cx="10911535" cy="310896"/>
+          </a:xfrm>
+          <a:prstGeom prst="rect">
+            <a:avLst/>
+          </a:prstGeom>
+          <a:noFill/>
+        </p:spPr>
+        <p:txBody>
+          <a:bodyPr wrap="square">
+            <a:spAutoFit/>
+          </a:bodyPr>
+          <a:lstStyle/>
+          <a:p>
+            <a:pPr algn="ctr"/>
+            <a:r>
+              <a:rPr sz="2000" b="0" i="0">
+                <a:solidFill>
+                  <a:srgbClr val="828282"/>
+                </a:solidFill>
+                <a:latin typeface="Arial"/>
+              </a:rPr>
+              <a:t>罪は深紅の汚れを残した</a:t>
+            </a:r>
+          </a:p>
+        </p:txBody>
+      </p:sp>
+      <p:sp>
+        <p:nvSpPr>
+          <p:cNvPr id="5" name="TextBox 4"/>
+          <p:cNvSpPr txBox="1"/>
+          <p:nvPr/>
+        </p:nvSpPr>
+        <p:spPr>
+          <a:xfrm>
+            <a:off x="640080" y="4494276"/>
+            <a:ext cx="10911535" cy="310896"/>
+          </a:xfrm>
+          <a:prstGeom prst="rect">
+            <a:avLst/>
+          </a:prstGeom>
+          <a:noFill/>
+        </p:spPr>
+        <p:txBody>
+          <a:bodyPr wrap="square">
+            <a:spAutoFit/>
+          </a:bodyPr>
+          <a:lstStyle/>
+          <a:p>
+            <a:pPr algn="ctr"/>
+            <a:r>
+              <a:rPr sz="2000" b="0" i="0">
+                <a:solidFill>
+                  <a:srgbClr val="828282"/>
+                </a:solidFill>
+                <a:latin typeface="Arial"/>
+              </a:rPr>
+              <a:t>彼は私を雪のように白く洗った</a:t>
             </a:r>
           </a:p>
         </p:txBody>
